--- a/lecture_pptx/out/s15/ワーク01.pptx
+++ b/lecture_pptx/out/s15/ワーク01.pptx
@@ -2279,7 +2279,7 @@
         <p:spPr>
           <a:xfrm>
             <a:off x="365760" y="1188720"/>
-            <a:ext cx="1979676" cy="2468880"/>
+            <a:ext cx="1979676" cy="3017520"/>
           </a:xfrm>
           <a:prstGeom prst="roundRect">
             <a:avLst>
@@ -2386,8 +2386,8 @@
         </p:nvSpPr>
         <p:spPr>
           <a:xfrm>
-            <a:off x="530352" y="1901952"/>
-            <a:ext cx="1650492" cy="1645920"/>
+            <a:off x="530352" y="1938528"/>
+            <a:ext cx="1650492" cy="2148840"/>
           </a:xfrm>
           <a:prstGeom prst="rect">
             <a:avLst/>
@@ -2401,12 +2401,12 @@
           <a:p>
             <a:pPr indent="0" marL="0">
               <a:spcAft>
-                <a:spcPts val="200"/>
+                <a:spcPts val="600"/>
               </a:spcAft>
               <a:buNone/>
             </a:pPr>
             <a:r>
-              <a:rPr lang="en-US" sz="1300" dirty="0">
+              <a:rPr lang="en-US" sz="1600" dirty="0">
                 <a:solidFill>
                   <a:srgbClr val="1A1A1A"/>
                 </a:solidFill>
@@ -2416,7 +2416,7 @@
               </a:rPr>
               <a:t>保険を引受可能/不可/要確認 と判定する社内ルール。</a:t>
             </a:r>
-            <a:endParaRPr lang="en-US" sz="1300" dirty="0"/>
+            <a:endParaRPr lang="en-US" sz="1600" dirty="0"/>
           </a:p>
         </p:txBody>
       </p:sp>
@@ -2429,7 +2429,7 @@
         <p:spPr>
           <a:xfrm>
             <a:off x="2510028" y="1188720"/>
-            <a:ext cx="1979676" cy="2468880"/>
+            <a:ext cx="1979676" cy="3017520"/>
           </a:xfrm>
           <a:prstGeom prst="roundRect">
             <a:avLst>
@@ -2536,8 +2536,8 @@
         </p:nvSpPr>
         <p:spPr>
           <a:xfrm>
-            <a:off x="2674620" y="1901952"/>
-            <a:ext cx="1650492" cy="1645920"/>
+            <a:off x="2674620" y="1938528"/>
+            <a:ext cx="1650492" cy="2148840"/>
           </a:xfrm>
           <a:prstGeom prst="rect">
             <a:avLst/>
@@ -2551,12 +2551,12 @@
           <a:p>
             <a:pPr indent="0" marL="0">
               <a:spcAft>
-                <a:spcPts val="200"/>
+                <a:spcPts val="600"/>
               </a:spcAft>
               <a:buNone/>
             </a:pPr>
             <a:r>
-              <a:rPr lang="en-US" sz="1300" dirty="0">
+              <a:rPr lang="en-US" sz="1600" dirty="0">
                 <a:solidFill>
                   <a:srgbClr val="1A1A1A"/>
                 </a:solidFill>
@@ -2564,9 +2564,26 @@
                 <a:ea typeface="Yu Gothic UI" pitchFamily="34" charset="-122"/>
                 <a:cs typeface="Yu Gothic UI" pitchFamily="34" charset="-120"/>
               </a:rPr>
-              <a:t>最終判定の前の振り分け。AI に任せ、最終は人が決める。</a:t>
-            </a:r>
-            <a:endParaRPr lang="en-US" sz="1300" dirty="0"/>
+              <a:t>最終判定の前の振り分け。</a:t>
+            </a:r>
+            <a:pPr indent="0" marL="0">
+              <a:spcAft>
+                <a:spcPts val="600"/>
+              </a:spcAft>
+              <a:buNone/>
+            </a:pPr>
+            <a:r>
+              <a:rPr lang="en-US" sz="1600" dirty="0">
+                <a:solidFill>
+                  <a:srgbClr val="1A1A1A"/>
+                </a:solidFill>
+                <a:latin typeface="Yu Gothic UI" pitchFamily="34" charset="0"/>
+                <a:ea typeface="Yu Gothic UI" pitchFamily="34" charset="-122"/>
+                <a:cs typeface="Yu Gothic UI" pitchFamily="34" charset="-120"/>
+              </a:rPr>
+              <a:t>AI に任せ、最終は人が決める。</a:t>
+            </a:r>
+            <a:endParaRPr lang="en-US" sz="1600" dirty="0"/>
           </a:p>
         </p:txBody>
       </p:sp>
@@ -2579,7 +2596,7 @@
         <p:spPr>
           <a:xfrm>
             <a:off x="4654296" y="1188720"/>
-            <a:ext cx="1979676" cy="2468880"/>
+            <a:ext cx="1979676" cy="3017520"/>
           </a:xfrm>
           <a:prstGeom prst="roundRect">
             <a:avLst>
@@ -2686,8 +2703,8 @@
         </p:nvSpPr>
         <p:spPr>
           <a:xfrm>
-            <a:off x="4818888" y="1901952"/>
-            <a:ext cx="1650492" cy="1645920"/>
+            <a:off x="4818888" y="1938528"/>
+            <a:ext cx="1650492" cy="2148840"/>
           </a:xfrm>
           <a:prstGeom prst="rect">
             <a:avLst/>
@@ -2701,12 +2718,12 @@
           <a:p>
             <a:pPr indent="0" marL="0">
               <a:spcAft>
-                <a:spcPts val="200"/>
+                <a:spcPts val="600"/>
               </a:spcAft>
               <a:buNone/>
             </a:pPr>
             <a:r>
-              <a:rPr lang="en-US" sz="1300" dirty="0">
+              <a:rPr lang="en-US" sz="1600" dirty="0">
                 <a:solidFill>
                   <a:srgbClr val="1A1A1A"/>
                 </a:solidFill>
@@ -2716,7 +2733,7 @@
               </a:rPr>
               <a:t>YES/NO 即決できず、追加情報や上長判断が必要なケース。</a:t>
             </a:r>
-            <a:endParaRPr lang="en-US" sz="1300" dirty="0"/>
+            <a:endParaRPr lang="en-US" sz="1600" dirty="0"/>
           </a:p>
         </p:txBody>
       </p:sp>
@@ -2729,7 +2746,7 @@
         <p:spPr>
           <a:xfrm>
             <a:off x="6798564" y="1188720"/>
-            <a:ext cx="1979676" cy="2468880"/>
+            <a:ext cx="1979676" cy="3017520"/>
           </a:xfrm>
           <a:prstGeom prst="roundRect">
             <a:avLst>
@@ -2836,8 +2853,8 @@
         </p:nvSpPr>
         <p:spPr>
           <a:xfrm>
-            <a:off x="6963156" y="1901952"/>
-            <a:ext cx="1650492" cy="1645920"/>
+            <a:off x="6963156" y="1938528"/>
+            <a:ext cx="1650492" cy="2148840"/>
           </a:xfrm>
           <a:prstGeom prst="rect">
             <a:avLst/>
@@ -2851,12 +2868,12 @@
           <a:p>
             <a:pPr indent="0" marL="0">
               <a:spcAft>
-                <a:spcPts val="200"/>
+                <a:spcPts val="600"/>
               </a:spcAft>
               <a:buNone/>
             </a:pPr>
             <a:r>
-              <a:rPr lang="en-US" sz="1300" dirty="0">
+              <a:rPr lang="en-US" sz="1600" dirty="0">
                 <a:solidFill>
                   <a:srgbClr val="1A1A1A"/>
                 </a:solidFill>
@@ -2866,7 +2883,7 @@
               </a:rPr>
               <a:t>判断に迷う案件を上位者に引き上げること。</a:t>
             </a:r>
-            <a:endParaRPr lang="en-US" sz="1300" dirty="0"/>
+            <a:endParaRPr lang="en-US" sz="1600" dirty="0"/>
           </a:p>
         </p:txBody>
       </p:sp>
@@ -2878,8 +2895,8 @@
         </p:nvSpPr>
         <p:spPr>
           <a:xfrm>
-            <a:off x="365760" y="3931920"/>
-            <a:ext cx="8412480" cy="1188720"/>
+            <a:off x="365760" y="4389120"/>
+            <a:ext cx="8412480" cy="914400"/>
           </a:xfrm>
           <a:prstGeom prst="rect">
             <a:avLst/>

--- a/lecture_pptx/out/s15/ワーク01.pptx
+++ b/lecture_pptx/out/s15/ワーク01.pptx
@@ -1551,7 +1551,7 @@
                 <a:ea typeface="Yu Gothic UI Semibold" pitchFamily="34" charset="-122"/>
                 <a:cs typeface="Yu Gothic UI Semibold" pitchFamily="34" charset="-120"/>
               </a:rPr>
-              <a:t>引受基準の整理と AI 落とし込み</a:t>
+              <a:t>散在ナレッジを "引受判定マスタ表" に統合する</a:t>
             </a:r>
             <a:endParaRPr lang="en-US" sz="3800" dirty="0"/>
           </a:p>
@@ -1590,7 +1590,7 @@
                 <a:ea typeface="Yu Gothic UI" pitchFamily="34" charset="-122"/>
                 <a:cs typeface="Yu Gothic UI" pitchFamily="34" charset="-120"/>
               </a:rPr>
-              <a:t>属人化した判断を「型」にして、新人も判断できる土台を作る</a:t>
+              <a:t>口伝・チャット・旧文書に散らばる判定ルールを、AIが読める1つの表に統合し、更新できる形にする</a:t>
             </a:r>
             <a:endParaRPr lang="en-US" sz="1900" dirty="0"/>
           </a:p>
@@ -1806,7 +1806,7 @@
                 <a:ea typeface="Yu Gothic UI Semibold" pitchFamily="34" charset="-122"/>
                 <a:cs typeface="Yu Gothic UI Semibold" pitchFamily="34" charset="-120"/>
               </a:rPr>
-              <a:t>基準を3段階で整理</a:t>
+              <a:t>ナレッジを1つの表に統合</a:t>
             </a:r>
             <a:endParaRPr lang="en-US" sz="1700" dirty="0"/>
           </a:p>
@@ -1845,7 +1845,7 @@
                 <a:ea typeface="Yu Gothic UI" pitchFamily="34" charset="-122"/>
                 <a:cs typeface="Yu Gothic UI" pitchFamily="34" charset="-120"/>
               </a:rPr>
-              <a:t>YES/NO/要確認 で20件分類する。</a:t>
+              <a:t>口伝メモ/Slack/旧マニュアル/雑Excel/メール/パンフ をマスタ表(10列)に集約</a:t>
             </a:r>
             <a:endParaRPr lang="en-US" sz="1300" dirty="0"/>
           </a:p>
@@ -1970,7 +1970,7 @@
                 <a:ea typeface="Yu Gothic UI Semibold" pitchFamily="34" charset="-122"/>
                 <a:cs typeface="Yu Gothic UI Semibold" pitchFamily="34" charset="-120"/>
               </a:rPr>
-              <a:t>AI への落とし込み</a:t>
+              <a:t>更新運用ルールを決める</a:t>
             </a:r>
             <a:endParaRPr lang="en-US" sz="1700" dirty="0"/>
           </a:p>
@@ -2009,7 +2009,7 @@
                 <a:ea typeface="Yu Gothic UI" pitchFamily="34" charset="-122"/>
                 <a:cs typeface="Yu Gothic UI" pitchFamily="34" charset="-120"/>
               </a:rPr>
-              <a:t>整理した基準を一次判定プロンプトに変換。</a:t>
+              <a:t>誰がいつ何を更新するか、根拠と履歴が追える形にする</a:t>
             </a:r>
             <a:endParaRPr lang="en-US" sz="1300" dirty="0"/>
           </a:p>
@@ -2134,7 +2134,7 @@
                 <a:ea typeface="Yu Gothic UI Semibold" pitchFamily="34" charset="-122"/>
                 <a:cs typeface="Yu Gothic UI Semibold" pitchFamily="34" charset="-120"/>
               </a:rPr>
-              <a:t>判定範囲の言語化</a:t>
+              <a:t>AI 一次判定に載る形へ</a:t>
             </a:r>
             <a:endParaRPr lang="en-US" sz="1700" dirty="0"/>
           </a:p>
@@ -2173,7 +2173,7 @@
                 <a:ea typeface="Yu Gothic UI" pitchFamily="34" charset="-122"/>
                 <a:cs typeface="Yu Gothic UI" pitchFamily="34" charset="-120"/>
               </a:rPr>
-              <a:t>AIに任せる範囲/任せない範囲を明確化。</a:t>
+              <a:t>マスタ表をそのまま Gemini に渡し、一次判定できる状態を作る</a:t>
             </a:r>
             <a:endParaRPr lang="en-US" sz="1300" dirty="0"/>
           </a:p>
@@ -2372,7 +2372,7 @@
                 <a:ea typeface="Yu Gothic UI Semibold" pitchFamily="34" charset="-122"/>
                 <a:cs typeface="Yu Gothic UI Semibold" pitchFamily="34" charset="-120"/>
               </a:rPr>
-              <a:t>引受基準</a:t>
+              <a:t>引受判定マスタ表</a:t>
             </a:r>
             <a:endParaRPr lang="en-US" sz="1600" dirty="0"/>
           </a:p>
@@ -2414,7 +2414,7 @@
                 <a:ea typeface="Yu Gothic UI" pitchFamily="34" charset="-122"/>
                 <a:cs typeface="Yu Gothic UI" pitchFamily="34" charset="-120"/>
               </a:rPr>
-              <a:t>保険を引受可能/不可/要確認 と判定する社内ルール。</a:t>
+              <a:t>YES/NO/要確認 のルールを 1行1条件で管理する共通表(10列)。</a:t>
             </a:r>
             <a:endParaRPr lang="en-US" sz="1600" dirty="0"/>
           </a:p>
@@ -2522,7 +2522,7 @@
                 <a:ea typeface="Yu Gothic UI Semibold" pitchFamily="34" charset="-122"/>
                 <a:cs typeface="Yu Gothic UI Semibold" pitchFamily="34" charset="-120"/>
               </a:rPr>
-              <a:t>一次判定</a:t>
+              <a:t>条件ID</a:t>
             </a:r>
             <a:endParaRPr lang="en-US" sz="1600" dirty="0"/>
           </a:p>
@@ -2564,7 +2564,7 @@
                 <a:ea typeface="Yu Gothic UI" pitchFamily="34" charset="-122"/>
                 <a:cs typeface="Yu Gothic UI" pitchFamily="34" charset="-120"/>
               </a:rPr>
-              <a:t>最終判定の前の振り分け。</a:t>
+              <a:t>各ルールに RULE-001 などの一意ID。</a:t>
             </a:r>
             <a:pPr indent="0" marL="0">
               <a:spcAft>
@@ -2581,7 +2581,7 @@
                 <a:ea typeface="Yu Gothic UI" pitchFamily="34" charset="-122"/>
                 <a:cs typeface="Yu Gothic UI" pitchFamily="34" charset="-120"/>
               </a:rPr>
-              <a:t>AI に任せ、最終は人が決める。</a:t>
+              <a:t>判定結果の監査に使う。</a:t>
             </a:r>
             <a:endParaRPr lang="en-US" sz="1600" dirty="0"/>
           </a:p>
@@ -2689,7 +2689,7 @@
                 <a:ea typeface="Yu Gothic UI Semibold" pitchFamily="34" charset="-122"/>
                 <a:cs typeface="Yu Gothic UI Semibold" pitchFamily="34" charset="-120"/>
               </a:rPr>
-              <a:t>要確認</a:t>
+              <a:t>根拠列</a:t>
             </a:r>
             <a:endParaRPr lang="en-US" sz="1600" dirty="0"/>
           </a:p>
@@ -2731,7 +2731,7 @@
                 <a:ea typeface="Yu Gothic UI" pitchFamily="34" charset="-122"/>
                 <a:cs typeface="Yu Gothic UI" pitchFamily="34" charset="-120"/>
               </a:rPr>
-              <a:t>YES/NO 即決できず、追加情報や上長判断が必要なケース。</a:t>
+              <a:t>内規条項/パンフ/メール引用/口伝など、判定の裏付けを明記。</a:t>
             </a:r>
             <a:endParaRPr lang="en-US" sz="1600" dirty="0"/>
           </a:p>
@@ -2839,7 +2839,7 @@
                 <a:ea typeface="Yu Gothic UI Semibold" pitchFamily="34" charset="-122"/>
                 <a:cs typeface="Yu Gothic UI Semibold" pitchFamily="34" charset="-120"/>
               </a:rPr>
-              <a:t>エスカレーション</a:t>
+              <a:t>更新ログ</a:t>
             </a:r>
             <a:endParaRPr lang="en-US" sz="1600" dirty="0"/>
           </a:p>
@@ -2881,7 +2881,24 @@
                 <a:ea typeface="Yu Gothic UI" pitchFamily="34" charset="-122"/>
                 <a:cs typeface="Yu Gothic UI" pitchFamily="34" charset="-120"/>
               </a:rPr>
-              <a:t>判断に迷う案件を上位者に引き上げること。</a:t>
+              <a:t>マスタ表の変更履歴を残すシート。</a:t>
+            </a:r>
+            <a:pPr indent="0" marL="0">
+              <a:spcAft>
+                <a:spcPts val="600"/>
+              </a:spcAft>
+              <a:buNone/>
+            </a:pPr>
+            <a:r>
+              <a:rPr lang="en-US" sz="1600" dirty="0">
+                <a:solidFill>
+                  <a:srgbClr val="1A1A1A"/>
+                </a:solidFill>
+                <a:latin typeface="Yu Gothic UI" pitchFamily="34" charset="0"/>
+                <a:ea typeface="Yu Gothic UI" pitchFamily="34" charset="-122"/>
+                <a:cs typeface="Yu Gothic UI" pitchFamily="34" charset="-120"/>
+              </a:rPr>
+              <a:t>月1回15分の見直しで記入。</a:t>
             </a:r>
             <a:endParaRPr lang="en-US" sz="1600" dirty="0"/>
           </a:p>
@@ -2934,7 +2951,7 @@
                 <a:ea typeface="Yu Gothic UI" pitchFamily="34" charset="-122"/>
                 <a:cs typeface="Yu Gothic UI" pitchFamily="34" charset="-120"/>
               </a:rPr>
-              <a:t>引受基準: </a:t>
+              <a:t>引受判定マスタ表: </a:t>
             </a:r>
             <a:pPr indent="0" marL="0">
               <a:buNone/>
@@ -2948,7 +2965,7 @@
                 <a:ea typeface="Yu Gothic UI" pitchFamily="34" charset="-122"/>
                 <a:cs typeface="Yu Gothic UI" pitchFamily="34" charset="-120"/>
               </a:rPr>
-              <a:t>社によって異なる   </a:t>
+              <a:t>全ナレッジの統合先   </a:t>
             </a:r>
             <a:pPr indent="0" marL="0">
               <a:buNone/>
@@ -2976,7 +2993,7 @@
                 <a:ea typeface="Yu Gothic UI" pitchFamily="34" charset="-122"/>
                 <a:cs typeface="Yu Gothic UI" pitchFamily="34" charset="-120"/>
               </a:rPr>
-              <a:t>一次判定: </a:t>
+              <a:t>条件ID: </a:t>
             </a:r>
             <a:pPr indent="0" marL="0">
               <a:buNone/>
@@ -2990,7 +3007,7 @@
                 <a:ea typeface="Yu Gothic UI" pitchFamily="34" charset="-122"/>
                 <a:cs typeface="Yu Gothic UI" pitchFamily="34" charset="-120"/>
               </a:rPr>
-              <a:t>時間短縮の効果大   </a:t>
+              <a:t>削除より "無効化" 推奨   </a:t>
             </a:r>
             <a:pPr indent="0" marL="0">
               <a:buNone/>
@@ -3018,7 +3035,7 @@
                 <a:ea typeface="Yu Gothic UI" pitchFamily="34" charset="-122"/>
                 <a:cs typeface="Yu Gothic UI" pitchFamily="34" charset="-120"/>
               </a:rPr>
-              <a:t>要確認: </a:t>
+              <a:t>根拠列: </a:t>
             </a:r>
             <a:pPr indent="0" marL="0">
               <a:buNone/>
@@ -3032,7 +3049,7 @@
                 <a:ea typeface="Yu Gothic UI" pitchFamily="34" charset="-122"/>
                 <a:cs typeface="Yu Gothic UI" pitchFamily="34" charset="-120"/>
               </a:rPr>
-              <a:t>一番難しい判定   </a:t>
+              <a:t>"口伝" もそのまま書く   </a:t>
             </a:r>
             <a:pPr indent="0" marL="0">
               <a:buNone/>
@@ -3060,7 +3077,7 @@
                 <a:ea typeface="Yu Gothic UI" pitchFamily="34" charset="-122"/>
                 <a:cs typeface="Yu Gothic UI" pitchFamily="34" charset="-120"/>
               </a:rPr>
-              <a:t>エスカレーション: </a:t>
+              <a:t>更新ログ: </a:t>
             </a:r>
             <a:pPr indent="0" marL="0">
               <a:buNone/>
@@ -3074,7 +3091,7 @@
                 <a:ea typeface="Yu Gothic UI" pitchFamily="34" charset="-122"/>
                 <a:cs typeface="Yu Gothic UI" pitchFamily="34" charset="-120"/>
               </a:rPr>
-              <a:t>基準を明文化必須</a:t>
+              <a:t>削除より無効化</a:t>
             </a:r>
             <a:endParaRPr lang="en-US" sz="1100" dirty="0"/>
           </a:p>
@@ -3165,7 +3182,7 @@
                 <a:ea typeface="Yu Gothic UI Semibold" pitchFamily="34" charset="-122"/>
                 <a:cs typeface="Yu Gothic UI Semibold" pitchFamily="34" charset="-120"/>
               </a:rPr>
-              <a:t>演習1 引受基準を3段階で整理</a:t>
+              <a:t>演習1 散在ナレッジを「マスタ表」10列に整理する</a:t>
             </a:r>
             <a:endParaRPr lang="en-US" sz="2600" dirty="0"/>
           </a:p>
@@ -3293,7 +3310,47 @@
                 <a:ea typeface="Yu Gothic UI" pitchFamily="34" charset="-122"/>
                 <a:cs typeface="Yu Gothic UI" pitchFamily="34" charset="-120"/>
               </a:rPr>
-              <a:t>引受判断が属人化していて、ベテランしか分からない。よくある20シーンを YES/NO/要確認 で分類する。</a:t>
+              <a:t>引受判定のルールが、口伝メモ/Slack/旧マニュアル/雑Excel/QAメール/商品パンフ に散らばっている。</a:t>
+            </a:r>
+            <a:endParaRPr lang="en-US" sz="1400" dirty="0"/>
+          </a:p>
+          <a:p>
+            <a:pPr indent="0" marL="0">
+              <a:spcAft>
+                <a:spcPts val="400"/>
+              </a:spcAft>
+              <a:buNone/>
+            </a:pPr>
+            <a:r>
+              <a:rPr lang="en-US" sz="1400" dirty="0">
+                <a:solidFill>
+                  <a:srgbClr val="1A1A1A"/>
+                </a:solidFill>
+                <a:latin typeface="Yu Gothic UI" pitchFamily="34" charset="0"/>
+                <a:ea typeface="Yu Gothic UI" pitchFamily="34" charset="-122"/>
+                <a:cs typeface="Yu Gothic UI" pitchFamily="34" charset="-120"/>
+              </a:rPr>
+              <a:t>同梱の「デモナレッジ 01〜06」を素材に、1つの「引受判定マスタ表」(10列)に統合する。</a:t>
+            </a:r>
+            <a:endParaRPr lang="en-US" sz="1400" dirty="0"/>
+          </a:p>
+          <a:p>
+            <a:pPr indent="0" marL="0">
+              <a:spcAft>
+                <a:spcPts val="400"/>
+              </a:spcAft>
+              <a:buNone/>
+            </a:pPr>
+            <a:r>
+              <a:rPr lang="en-US" sz="1400" dirty="0">
+                <a:solidFill>
+                  <a:srgbClr val="1A1A1A"/>
+                </a:solidFill>
+                <a:latin typeface="Yu Gothic UI" pitchFamily="34" charset="0"/>
+                <a:ea typeface="Yu Gothic UI" pitchFamily="34" charset="-122"/>
+                <a:cs typeface="Yu Gothic UI" pitchFamily="34" charset="-120"/>
+              </a:rPr>
+              <a:t>完成イメージは 別シート「引受判定マスタ_記入例」(25行) に用意。</a:t>
             </a:r>
             <a:endParaRPr lang="en-US" sz="1400" dirty="0"/>
           </a:p>
@@ -3422,7 +3479,7 @@
                 <a:ea typeface="Yu Gothic UI" pitchFamily="34" charset="-122"/>
                 <a:cs typeface="Yu Gothic UI" pitchFamily="34" charset="-120"/>
               </a:rPr>
-              <a:t>シーンは「年齢+健康状態+加入希望商品」のパターンで</a:t>
+              <a:t>ナレッジは形式バラバラ、そのままAIに渡しても判定できないから "共通の型" に揃える</a:t>
             </a:r>
             <a:endParaRPr lang="en-US" sz="1400" dirty="0"/>
           </a:p>
@@ -3443,7 +3500,7 @@
                 <a:ea typeface="Yu Gothic UI" pitchFamily="34" charset="-122"/>
                 <a:cs typeface="Yu Gothic UI" pitchFamily="34" charset="-120"/>
               </a:rPr>
-              <a:t>Gemini に分類補助を依頼</a:t>
+              <a:t>曖昧な口伝(「田中課長が言ってた」)も根拠列に残す(後で正式化するため)</a:t>
             </a:r>
             <a:endParaRPr lang="en-US" sz="1400" dirty="0"/>
           </a:p>
@@ -3464,7 +3521,7 @@
                 <a:ea typeface="Yu Gothic UI" pitchFamily="34" charset="-122"/>
                 <a:cs typeface="Yu Gothic UI" pitchFamily="34" charset="-120"/>
               </a:rPr>
-              <a:t>社内ルールと照合</a:t>
+              <a:t>条件詳細列は "年齢/健康/職業/金額" のどの軸か明確に書く</a:t>
             </a:r>
             <a:endParaRPr lang="en-US" sz="1400" dirty="0"/>
           </a:p>
@@ -3485,7 +3542,7 @@
                 <a:ea typeface="Yu Gothic UI" pitchFamily="34" charset="-122"/>
                 <a:cs typeface="Yu Gothic UI" pitchFamily="34" charset="-120"/>
               </a:rPr>
-              <a:t>スプシで保管</a:t>
+              <a:t>判定理由は "経験上" ではなく "○○のため" と1文で</a:t>
             </a:r>
             <a:endParaRPr lang="en-US" sz="1400" dirty="0"/>
           </a:p>
@@ -3614,7 +3671,7 @@
                 <a:ea typeface="Yu Gothic UI" pitchFamily="34" charset="-122"/>
                 <a:cs typeface="Yu Gothic UI" pitchFamily="34" charset="-120"/>
               </a:rPr>
-              <a:t>過去によくあるシーン20件を書き出し</a:t>
+              <a:t>スプシ「引受判定マスタ」テンプレを開く(10列: ID/カテゴリ/対象商品/条件詳細/判定/理由/追加確認or代替案/エスカレ先/根拠/更新日)</a:t>
             </a:r>
             <a:endParaRPr lang="en-US" sz="1400" dirty="0"/>
           </a:p>
@@ -3635,7 +3692,7 @@
                 <a:ea typeface="Yu Gothic UI" pitchFamily="34" charset="-122"/>
                 <a:cs typeface="Yu Gothic UI" pitchFamily="34" charset="-120"/>
               </a:rPr>
-              <a:t>YES/NO/要確認 で分類</a:t>
+              <a:t>別シート「引受判定マスタ_記入例」で完成イメージを掴む</a:t>
             </a:r>
             <a:endParaRPr lang="en-US" sz="1400" dirty="0"/>
           </a:p>
@@ -3656,7 +3713,7 @@
                 <a:ea typeface="Yu Gothic UI" pitchFamily="34" charset="-122"/>
                 <a:cs typeface="Yu Gothic UI" pitchFamily="34" charset="-120"/>
               </a:rPr>
-              <a:t>判断理由を1行で言語化</a:t>
+              <a:t>デモナレッジ 01〜06 を1つずつ読み、条件を抽出してマスタ表に1行ずつ書く</a:t>
             </a:r>
             <a:endParaRPr lang="en-US" sz="1400" dirty="0"/>
           </a:p>
@@ -3677,7 +3734,28 @@
                 <a:ea typeface="Yu Gothic UI" pitchFamily="34" charset="-122"/>
                 <a:cs typeface="Yu Gothic UI" pitchFamily="34" charset="-120"/>
               </a:rPr>
-              <a:t>要確認のエスカレーション先を明記</a:t>
+              <a:t>同じ条件が複数ナレッジに登場したら 1行に統合、根拠列に両方書く</a:t>
+            </a:r>
+            <a:endParaRPr lang="en-US" sz="1400" dirty="0"/>
+          </a:p>
+          <a:p>
+            <a:pPr marL="342900" indent="-342900">
+              <a:spcAft>
+                <a:spcPts val="400"/>
+              </a:spcAft>
+              <a:buSzPct val="100000"/>
+              <a:buChar char="●"/>
+            </a:pPr>
+            <a:r>
+              <a:rPr lang="en-US" sz="1400" dirty="0">
+                <a:solidFill>
+                  <a:srgbClr val="1A1A1A"/>
+                </a:solidFill>
+                <a:latin typeface="Yu Gothic UI" pitchFamily="34" charset="0"/>
+                <a:ea typeface="Yu Gothic UI" pitchFamily="34" charset="-122"/>
+                <a:cs typeface="Yu Gothic UI" pitchFamily="34" charset="-120"/>
+              </a:rPr>
+              <a:t>20〜30行を目標。埋めきれない項目は "要確認" で残してOK</a:t>
             </a:r>
             <a:endParaRPr lang="en-US" sz="1400" dirty="0"/>
           </a:p>
@@ -3768,7 +3846,7 @@
                 <a:ea typeface="Yu Gothic UI Semibold" pitchFamily="34" charset="-122"/>
                 <a:cs typeface="Yu Gothic UI Semibold" pitchFamily="34" charset="-120"/>
               </a:rPr>
-              <a:t>演習1 引受基準を3段階で整理 — 観点別チェック</a:t>
+              <a:t>演習1 散在ナレッジを「マスタ表」10列に整理する — 観点別チェック</a:t>
             </a:r>
             <a:endParaRPr lang="en-US" sz="2600" dirty="0"/>
           </a:p>
@@ -3932,7 +4010,7 @@
                 <a:ea typeface="Yu Gothic UI Semibold" pitchFamily="34" charset="-122"/>
                 <a:cs typeface="Yu Gothic UI Semibold" pitchFamily="34" charset="-120"/>
               </a:rPr>
-              <a:t>A. 網羅性</a:t>
+              <a:t>A. 統合の一貫性</a:t>
             </a:r>
             <a:endParaRPr lang="en-US" sz="1500" dirty="0"/>
           </a:p>
@@ -3985,7 +4063,7 @@
                 <a:ea typeface="Yu Gothic UI" pitchFamily="34" charset="-122"/>
                 <a:cs typeface="Yu Gothic UI" pitchFamily="34" charset="-120"/>
               </a:rPr>
-              <a:t>頻出20シーンが現場の実態を反映しているか</a:t>
+              <a:t>同じ条件が複数ナレッジに出てきた時、1行に統合したか</a:t>
             </a:r>
             <a:endParaRPr lang="en-US" sz="1300" dirty="0"/>
           </a:p>
@@ -4038,7 +4116,7 @@
                 <a:ea typeface="Yu Gothic UI" pitchFamily="34" charset="-122"/>
                 <a:cs typeface="Yu Gothic UI" pitchFamily="34" charset="-120"/>
               </a:rPr>
-              <a:t>直近3ヶ月の引受相談を実例で</a:t>
+              <a:t>重複行が3個以上残っていたら要見直し(カテゴリでソートすると重複が見える)</a:t>
             </a:r>
             <a:endParaRPr lang="en-US" sz="1300" dirty="0"/>
           </a:p>
@@ -4163,7 +4241,7 @@
                 <a:ea typeface="Yu Gothic UI Semibold" pitchFamily="34" charset="-122"/>
                 <a:cs typeface="Yu Gothic UI Semibold" pitchFamily="34" charset="-120"/>
               </a:rPr>
-              <a:t>B. 判断理由の具体性</a:t>
+              <a:t>B. 根拠の明記</a:t>
             </a:r>
             <a:endParaRPr lang="en-US" sz="1500" dirty="0"/>
           </a:p>
@@ -4216,7 +4294,7 @@
                 <a:ea typeface="Yu Gothic UI" pitchFamily="34" charset="-122"/>
                 <a:cs typeface="Yu Gothic UI" pitchFamily="34" charset="-120"/>
               </a:rPr>
-              <a:t>理由が「経験上」でなく明文化できているか</a:t>
+              <a:t>根拠列に "誰が言った/どの文書" が全行に入っているか</a:t>
             </a:r>
             <a:endParaRPr lang="en-US" sz="1300" dirty="0"/>
           </a:p>
@@ -4269,7 +4347,7 @@
                 <a:ea typeface="Yu Gothic UI" pitchFamily="34" charset="-122"/>
                 <a:cs typeface="Yu Gothic UI" pitchFamily="34" charset="-120"/>
               </a:rPr>
-              <a:t>「○○の規定により」と根拠付け</a:t>
+              <a:t>空欄行があったら "口伝(要正式化)" と書かせる</a:t>
             </a:r>
             <a:endParaRPr lang="en-US" sz="1300" dirty="0"/>
           </a:p>
@@ -4394,7 +4472,7 @@
                 <a:ea typeface="Yu Gothic UI Semibold" pitchFamily="34" charset="-122"/>
                 <a:cs typeface="Yu Gothic UI Semibold" pitchFamily="34" charset="-120"/>
               </a:rPr>
-              <a:t>C. エスカレーション先の明確化</a:t>
+              <a:t>C. 判定理由の言語化</a:t>
             </a:r>
             <a:endParaRPr lang="en-US" sz="1500" dirty="0"/>
           </a:p>
@@ -4447,7 +4525,7 @@
                 <a:ea typeface="Yu Gothic UI" pitchFamily="34" charset="-122"/>
                 <a:cs typeface="Yu Gothic UI" pitchFamily="34" charset="-120"/>
               </a:rPr>
-              <a:t>要確認の引き上げ先が決まっているか</a:t>
+              <a:t>理由が "経験上" "なんとなく" になっていないか</a:t>
             </a:r>
             <a:endParaRPr lang="en-US" sz="1300" dirty="0"/>
           </a:p>
@@ -4500,7 +4578,7 @@
                 <a:ea typeface="Yu Gothic UI" pitchFamily="34" charset="-122"/>
                 <a:cs typeface="Yu Gothic UI" pitchFamily="34" charset="-120"/>
               </a:rPr>
-              <a:t>担当者名/部署/連絡手段まで</a:t>
+              <a:t>「○○の可能性があるため」「規定§〇〇により」と1文で書けているか目視</a:t>
             </a:r>
             <a:endParaRPr lang="en-US" sz="1300" dirty="0"/>
           </a:p>
@@ -4591,7 +4669,7 @@
                 <a:ea typeface="Yu Gothic UI Semibold" pitchFamily="34" charset="-122"/>
                 <a:cs typeface="Yu Gothic UI Semibold" pitchFamily="34" charset="-120"/>
               </a:rPr>
-              <a:t>演習2 一次判定プロンプトの設計</a:t>
+              <a:t>演習2 マスタ表を使った一次判定 と 更新運用</a:t>
             </a:r>
             <a:endParaRPr lang="en-US" sz="2600" dirty="0"/>
           </a:p>
@@ -4719,7 +4797,27 @@
                 <a:ea typeface="Yu Gothic UI" pitchFamily="34" charset="-122"/>
                 <a:cs typeface="Yu Gothic UI" pitchFamily="34" charset="-120"/>
               </a:rPr>
-              <a:t>基準は整理できたが、AIに渡せる形になっていない。プロンプトに変換する。</a:t>
+              <a:t>整理したマスタ表を Gemini に読ませて、顧客情報 → YES/NO/要確認 の一次判定ができるか試す。</a:t>
+            </a:r>
+            <a:endParaRPr lang="en-US" sz="1400" dirty="0"/>
+          </a:p>
+          <a:p>
+            <a:pPr indent="0" marL="0">
+              <a:spcAft>
+                <a:spcPts val="400"/>
+              </a:spcAft>
+              <a:buNone/>
+            </a:pPr>
+            <a:r>
+              <a:rPr lang="en-US" sz="1400" dirty="0">
+                <a:solidFill>
+                  <a:srgbClr val="1A1A1A"/>
+                </a:solidFill>
+                <a:latin typeface="Yu Gothic UI" pitchFamily="34" charset="0"/>
+                <a:ea typeface="Yu Gothic UI" pitchFamily="34" charset="-122"/>
+                <a:cs typeface="Yu Gothic UI" pitchFamily="34" charset="-120"/>
+              </a:rPr>
+              <a:t>あわせて「更新ログ」シートを埋めて、月次で見直せる仕組みを完成させる。</a:t>
             </a:r>
             <a:endParaRPr lang="en-US" sz="1400" dirty="0"/>
           </a:p>
@@ -4848,7 +4946,7 @@
                 <a:ea typeface="Yu Gothic UI" pitchFamily="34" charset="-122"/>
                 <a:cs typeface="Yu Gothic UI" pitchFamily="34" charset="-120"/>
               </a:rPr>
-              <a:t>Gemini に「引受一次判定プロンプト作成」を依頼</a:t>
+              <a:t>Gemini に「以下のマスタ表(CSV)を判定ルールとして使って」と明示</a:t>
             </a:r>
             <a:endParaRPr lang="en-US" sz="1400" dirty="0"/>
           </a:p>
@@ -4869,7 +4967,7 @@
                 <a:ea typeface="Yu Gothic UI" pitchFamily="34" charset="-122"/>
                 <a:cs typeface="Yu Gothic UI" pitchFamily="34" charset="-120"/>
               </a:rPr>
-              <a:t>出力テンプレを Few-shot で示す</a:t>
+              <a:t>該当なしの場合は「該当なし → 要確認(人が判定)」を返すよう指示に含める</a:t>
             </a:r>
             <a:endParaRPr lang="en-US" sz="1400" dirty="0"/>
           </a:p>
@@ -4890,7 +4988,7 @@
                 <a:ea typeface="Yu Gothic UI" pitchFamily="34" charset="-122"/>
                 <a:cs typeface="Yu Gothic UI" pitchFamily="34" charset="-120"/>
               </a:rPr>
-              <a:t>「最終判断は引受査定」と明記必須</a:t>
+              <a:t>更新は "削除" ではなく "無効化列" で運用(履歴が消えないように)</a:t>
             </a:r>
             <a:endParaRPr lang="en-US" sz="1400" dirty="0"/>
           </a:p>
@@ -4911,7 +5009,7 @@
                 <a:ea typeface="Yu Gothic UI" pitchFamily="34" charset="-122"/>
                 <a:cs typeface="Yu Gothic UI" pitchFamily="34" charset="-120"/>
               </a:rPr>
-              <a:t>テストシナリオ5件で精度確認</a:t>
+              <a:t>見直し会議は月1回15分でOK、続くことが最重要</a:t>
             </a:r>
             <a:endParaRPr lang="en-US" sz="1400" dirty="0"/>
           </a:p>
@@ -5040,7 +5138,7 @@
                 <a:ea typeface="Yu Gothic UI" pitchFamily="34" charset="-122"/>
                 <a:cs typeface="Yu Gothic UI" pitchFamily="34" charset="-120"/>
               </a:rPr>
-              <a:t>20件の基準を AI が判定できるプロンプト化</a:t>
+              <a:t>マスタ表をCSV形式で Gemini に渡し、顧客情報3件 → 一次判定を実行</a:t>
             </a:r>
             <a:endParaRPr lang="en-US" sz="1400" dirty="0"/>
           </a:p>
@@ -5061,7 +5159,7 @@
                 <a:ea typeface="Yu Gothic UI" pitchFamily="34" charset="-122"/>
                 <a:cs typeface="Yu Gothic UI" pitchFamily="34" charset="-120"/>
               </a:rPr>
-              <a:t>出力: 判定+理由+次のアクションの3要素</a:t>
+              <a:t>判定結果に「参照した条件ID」「判定」「理由」「次のアクション」の4要素を出力させる</a:t>
             </a:r>
             <a:endParaRPr lang="en-US" sz="1400" dirty="0"/>
           </a:p>
@@ -5082,7 +5180,7 @@
                 <a:ea typeface="Yu Gothic UI" pitchFamily="34" charset="-122"/>
                 <a:cs typeface="Yu Gothic UI" pitchFamily="34" charset="-120"/>
               </a:rPr>
-              <a:t>要確認の場合は具体的な確認項目を提示</a:t>
+              <a:t>該当ルールがない顧客を試す →「該当なし → 要確認」で返ることを確認</a:t>
             </a:r>
             <a:endParaRPr lang="en-US" sz="1400" dirty="0"/>
           </a:p>
@@ -5103,7 +5201,28 @@
                 <a:ea typeface="Yu Gothic UI" pitchFamily="34" charset="-122"/>
                 <a:cs typeface="Yu Gothic UI" pitchFamily="34" charset="-120"/>
               </a:rPr>
-              <a:t>免責事項を必ず含める</a:t>
+              <a:t>「更新ログ」シートに ダミー更新を2件 記入(追加/修正/無効化 の練習)</a:t>
+            </a:r>
+            <a:endParaRPr lang="en-US" sz="1400" dirty="0"/>
+          </a:p>
+          <a:p>
+            <a:pPr marL="342900" indent="-342900">
+              <a:spcAft>
+                <a:spcPts val="400"/>
+              </a:spcAft>
+              <a:buSzPct val="100000"/>
+              <a:buChar char="●"/>
+            </a:pPr>
+            <a:r>
+              <a:rPr lang="en-US" sz="1400" dirty="0">
+                <a:solidFill>
+                  <a:srgbClr val="1A1A1A"/>
+                </a:solidFill>
+                <a:latin typeface="Yu Gothic UI" pitchFamily="34" charset="0"/>
+                <a:ea typeface="Yu Gothic UI" pitchFamily="34" charset="-122"/>
+                <a:cs typeface="Yu Gothic UI" pitchFamily="34" charset="-120"/>
+              </a:rPr>
+              <a:t>月1回15分の見直し会議のアジェンダを決めて "運用ルール" として残す</a:t>
             </a:r>
             <a:endParaRPr lang="en-US" sz="1400" dirty="0"/>
           </a:p>
@@ -5194,7 +5313,7 @@
                 <a:ea typeface="Yu Gothic UI Semibold" pitchFamily="34" charset="-122"/>
                 <a:cs typeface="Yu Gothic UI Semibold" pitchFamily="34" charset="-120"/>
               </a:rPr>
-              <a:t>演習2 一次判定プロンプトの設計 — 観点別チェック</a:t>
+              <a:t>演習2 マスタ表を使った一次判定 と 更新運用 — 観点別チェック</a:t>
             </a:r>
             <a:endParaRPr lang="en-US" sz="2600" dirty="0"/>
           </a:p>
@@ -5358,7 +5477,7 @@
                 <a:ea typeface="Yu Gothic UI Semibold" pitchFamily="34" charset="-122"/>
                 <a:cs typeface="Yu Gothic UI Semibold" pitchFamily="34" charset="-120"/>
               </a:rPr>
-              <a:t>A. 判定の根拠提示</a:t>
+              <a:t>A. ルール参照の明示</a:t>
             </a:r>
             <a:endParaRPr lang="en-US" sz="1500" dirty="0"/>
           </a:p>
@@ -5411,7 +5530,7 @@
                 <a:ea typeface="Yu Gothic UI" pitchFamily="34" charset="-122"/>
                 <a:cs typeface="Yu Gothic UI" pitchFamily="34" charset="-120"/>
               </a:rPr>
-              <a:t>判定だけでなく理由が必ず出るか</a:t>
+              <a:t>AI が判定時にどの条件ID を参照したか出力させているか</a:t>
             </a:r>
             <a:endParaRPr lang="en-US" sz="1300" dirty="0"/>
           </a:p>
@@ -5464,7 +5583,7 @@
                 <a:ea typeface="Yu Gothic UI" pitchFamily="34" charset="-122"/>
                 <a:cs typeface="Yu Gothic UI" pitchFamily="34" charset="-120"/>
               </a:rPr>
-              <a:t>「理由なし禁止」をプロンプトに明記</a:t>
+              <a:t>出力に "参照ID: RULE-XXX" が入っているか確認</a:t>
             </a:r>
             <a:endParaRPr lang="en-US" sz="1300" dirty="0"/>
           </a:p>
@@ -5589,7 +5708,7 @@
                 <a:ea typeface="Yu Gothic UI Semibold" pitchFamily="34" charset="-122"/>
                 <a:cs typeface="Yu Gothic UI Semibold" pitchFamily="34" charset="-120"/>
               </a:rPr>
-              <a:t>B. 次アクションの具体性</a:t>
+              <a:t>B. 該当なしフォールバック</a:t>
             </a:r>
             <a:endParaRPr lang="en-US" sz="1500" dirty="0"/>
           </a:p>
@@ -5642,7 +5761,7 @@
                 <a:ea typeface="Yu Gothic UI" pitchFamily="34" charset="-122"/>
                 <a:cs typeface="Yu Gothic UI" pitchFamily="34" charset="-120"/>
               </a:rPr>
-              <a:t>「では何をするか」まで出力されるか</a:t>
+              <a:t>マスタにない条件が来た時 "要確認" にフォールバックしているか</a:t>
             </a:r>
             <a:endParaRPr lang="en-US" sz="1300" dirty="0"/>
           </a:p>
@@ -5695,7 +5814,7 @@
                 <a:ea typeface="Yu Gothic UI" pitchFamily="34" charset="-122"/>
                 <a:cs typeface="Yu Gothic UI" pitchFamily="34" charset="-120"/>
               </a:rPr>
-              <a:t>判定別に決まりアクションを用意</a:t>
+              <a:t>テスト: マスタにない条件で "自動 YES" になっていないか(逆に危険)</a:t>
             </a:r>
             <a:endParaRPr lang="en-US" sz="1300" dirty="0"/>
           </a:p>
@@ -5820,7 +5939,7 @@
                 <a:ea typeface="Yu Gothic UI Semibold" pitchFamily="34" charset="-122"/>
                 <a:cs typeface="Yu Gothic UI Semibold" pitchFamily="34" charset="-120"/>
               </a:rPr>
-              <a:t>C. 免責の明示</a:t>
+              <a:t>C. 更新運用の実効性</a:t>
             </a:r>
             <a:endParaRPr lang="en-US" sz="1500" dirty="0"/>
           </a:p>
@@ -5873,7 +5992,7 @@
                 <a:ea typeface="Yu Gothic UI" pitchFamily="34" charset="-122"/>
                 <a:cs typeface="Yu Gothic UI" pitchFamily="34" charset="-120"/>
               </a:rPr>
-              <a:t>AI判定が最終でないことが明示されるか</a:t>
+              <a:t>更新ログの記入と月次見直しが仕組みとして回るか</a:t>
             </a:r>
             <a:endParaRPr lang="en-US" sz="1300" dirty="0"/>
           </a:p>
@@ -5926,7 +6045,7 @@
                 <a:ea typeface="Yu Gothic UI" pitchFamily="34" charset="-122"/>
                 <a:cs typeface="Yu Gothic UI" pitchFamily="34" charset="-120"/>
               </a:rPr>
-              <a:t>「最終判断は引受査定」を必ず出力末尾に</a:t>
+              <a:t>担当者名/曜日まで決めさせる(「田中さんが毎月第1金曜」等)</a:t>
             </a:r>
             <a:endParaRPr lang="en-US" sz="1300" dirty="0"/>
           </a:p>
@@ -6122,7 +6241,7 @@
                 <a:ea typeface="Yu Gothic UI Semibold" pitchFamily="34" charset="-122"/>
                 <a:cs typeface="Yu Gothic UI Semibold" pitchFamily="34" charset="-120"/>
               </a:rPr>
-              <a:t>基準が言語化できた</a:t>
+              <a:t>散在ナレッジを1表に集約</a:t>
             </a:r>
             <a:endParaRPr lang="en-US" sz="1800" dirty="0"/>
           </a:p>
@@ -6161,7 +6280,7 @@
                 <a:ea typeface="Yu Gothic UI" pitchFamily="34" charset="-122"/>
                 <a:cs typeface="Yu Gothic UI" pitchFamily="34" charset="-120"/>
               </a:rPr>
-              <a:t>属人化から脱却、新人にも教えられる土台。</a:t>
+              <a:t>口伝/チャット/旧文書 → マスタ表10列。AIが読める共通型に。</a:t>
             </a:r>
             <a:endParaRPr lang="en-US" sz="1300" dirty="0"/>
           </a:p>
@@ -6266,7 +6385,7 @@
                 <a:ea typeface="Yu Gothic UI Semibold" pitchFamily="34" charset="-122"/>
                 <a:cs typeface="Yu Gothic UI Semibold" pitchFamily="34" charset="-120"/>
               </a:rPr>
-              <a:t>AI が一次判定を担う</a:t>
+              <a:t>更新と根拠が追える</a:t>
             </a:r>
             <a:endParaRPr lang="en-US" sz="1800" dirty="0"/>
           </a:p>
@@ -6305,7 +6424,7 @@
                 <a:ea typeface="Yu Gothic UI" pitchFamily="34" charset="-122"/>
                 <a:cs typeface="Yu Gothic UI" pitchFamily="34" charset="-120"/>
               </a:rPr>
-              <a:t>人は確認と最終判断に集中、時間が大幅短縮。</a:t>
+              <a:t>更新ログ+根拠列で、"なぜこの判定?" にいつでも答えられる。</a:t>
             </a:r>
             <a:endParaRPr lang="en-US" sz="1300" dirty="0"/>
           </a:p>
@@ -6410,7 +6529,7 @@
                 <a:ea typeface="Yu Gothic UI Semibold" pitchFamily="34" charset="-122"/>
                 <a:cs typeface="Yu Gothic UI Semibold" pitchFamily="34" charset="-120"/>
               </a:rPr>
-              <a:t>次回は Gem 化</a:t>
+              <a:t>一次判定は AI, 最終は人</a:t>
             </a:r>
             <a:endParaRPr lang="en-US" sz="1800" dirty="0"/>
           </a:p>
@@ -6449,7 +6568,7 @@
                 <a:ea typeface="Yu Gothic UI" pitchFamily="34" charset="-122"/>
                 <a:cs typeface="Yu Gothic UI" pitchFamily="34" charset="-120"/>
               </a:rPr>
-              <a:t>繰り返し使える形に、社内展開に進む。</a:t>
+              <a:t>判定結果に条件IDを付けて、人がいつでも監査できる状態。</a:t>
             </a:r>
             <a:endParaRPr lang="en-US" sz="1300" dirty="0"/>
           </a:p>

--- a/lecture_pptx/out/s15/ワーク01.pptx
+++ b/lecture_pptx/out/s15/ワーク01.pptx
@@ -1551,7 +1551,7 @@
                 <a:ea typeface="Yu Gothic UI Semibold" pitchFamily="34" charset="-122"/>
                 <a:cs typeface="Yu Gothic UI Semibold" pitchFamily="34" charset="-120"/>
               </a:rPr>
-              <a:t>散在ナレッジを "引受判定マスタ表" に統合する</a:t>
+              <a:t>代理店の "事前引受スクリーニング" を マスタ表化する</a:t>
             </a:r>
             <a:endParaRPr lang="en-US" sz="3800" dirty="0"/>
           </a:p>
@@ -1590,7 +1590,7 @@
                 <a:ea typeface="Yu Gothic UI" pitchFamily="34" charset="-122"/>
                 <a:cs typeface="Yu Gothic UI" pitchFamily="34" charset="-120"/>
               </a:rPr>
-              <a:t>口伝・チャット・旧文書に散らばる判定ルールを、AIが読める1つの表に統合し、更新できる形にする</a:t>
+              <a:t>扱う各社の引受基準を1つの表に整理し、AIで "どの会社なら通りそうか" を申込前に見立てる</a:t>
             </a:r>
             <a:endParaRPr lang="en-US" sz="1900" dirty="0"/>
           </a:p>
@@ -1806,7 +1806,7 @@
                 <a:ea typeface="Yu Gothic UI Semibold" pitchFamily="34" charset="-122"/>
                 <a:cs typeface="Yu Gothic UI Semibold" pitchFamily="34" charset="-120"/>
               </a:rPr>
-              <a:t>ナレッジを1つの表に統合</a:t>
+              <a:t>各社の基準を1つの表に集約</a:t>
             </a:r>
             <a:endParaRPr lang="en-US" sz="1700" dirty="0"/>
           </a:p>
@@ -1845,7 +1845,7 @@
                 <a:ea typeface="Yu Gothic UI" pitchFamily="34" charset="-122"/>
                 <a:cs typeface="Yu Gothic UI" pitchFamily="34" charset="-120"/>
               </a:rPr>
-              <a:t>口伝メモ/Slack/旧マニュアル/雑Excel/メール/パンフ をマスタ表(10列)に集約</a:t>
+              <a:t>先輩口伝/各社営業チャット/A社研修/過去申込メモ/QAメール/各社パンフ をマスタ表(10列)に統合</a:t>
             </a:r>
             <a:endParaRPr lang="en-US" sz="1300" dirty="0"/>
           </a:p>
@@ -1970,7 +1970,7 @@
                 <a:ea typeface="Yu Gothic UI Semibold" pitchFamily="34" charset="-122"/>
                 <a:cs typeface="Yu Gothic UI Semibold" pitchFamily="34" charset="-120"/>
               </a:rPr>
-              <a:t>更新運用ルールを決める</a:t>
+              <a:t>"どの会社が通る?" が見える形へ</a:t>
             </a:r>
             <a:endParaRPr lang="en-US" sz="1700" dirty="0"/>
           </a:p>
@@ -2009,7 +2009,7 @@
                 <a:ea typeface="Yu Gothic UI" pitchFamily="34" charset="-122"/>
                 <a:cs typeface="Yu Gothic UI" pitchFamily="34" charset="-120"/>
               </a:rPr>
-              <a:t>誰がいつ何を更新するか、根拠と履歴が追える形にする</a:t>
+              <a:t>同じ条件でも会社ごとに判定が違うのを 横並びで比較できる形にする</a:t>
             </a:r>
             <a:endParaRPr lang="en-US" sz="1300" dirty="0"/>
           </a:p>
@@ -2134,7 +2134,7 @@
                 <a:ea typeface="Yu Gothic UI Semibold" pitchFamily="34" charset="-122"/>
                 <a:cs typeface="Yu Gothic UI Semibold" pitchFamily="34" charset="-120"/>
               </a:rPr>
-              <a:t>AI 一次判定に載る形へ</a:t>
+              <a:t>AI 一次判定 &amp; 更新運用</a:t>
             </a:r>
             <a:endParaRPr lang="en-US" sz="1700" dirty="0"/>
           </a:p>
@@ -2173,7 +2173,7 @@
                 <a:ea typeface="Yu Gothic UI" pitchFamily="34" charset="-122"/>
                 <a:cs typeface="Yu Gothic UI" pitchFamily="34" charset="-120"/>
               </a:rPr>
-              <a:t>マスタ表をそのまま Gemini に渡し、一次判定できる状態を作る</a:t>
+              <a:t>マスタ表を Gemini に渡し "会社別の見立て" を返す + 月1回15分の見直し</a:t>
             </a:r>
             <a:endParaRPr lang="en-US" sz="1300" dirty="0"/>
           </a:p>
@@ -2414,7 +2414,7 @@
                 <a:ea typeface="Yu Gothic UI" pitchFamily="34" charset="-122"/>
                 <a:cs typeface="Yu Gothic UI" pitchFamily="34" charset="-120"/>
               </a:rPr>
-              <a:t>YES/NO/要確認 のルールを 1行1条件で管理する共通表(10列)。</a:t>
+              <a:t>各社の引受基準を 1行 = 1(条件×会社×商品ジャンル) で管理する共通表(10列)。</a:t>
             </a:r>
             <a:endParaRPr lang="en-US" sz="1600" dirty="0"/>
           </a:p>
@@ -2522,7 +2522,7 @@
                 <a:ea typeface="Yu Gothic UI Semibold" pitchFamily="34" charset="-122"/>
                 <a:cs typeface="Yu Gothic UI Semibold" pitchFamily="34" charset="-120"/>
               </a:rPr>
-              <a:t>条件ID</a:t>
+              <a:t>事前スクリーニング</a:t>
             </a:r>
             <a:endParaRPr lang="en-US" sz="1600" dirty="0"/>
           </a:p>
@@ -2564,7 +2564,7 @@
                 <a:ea typeface="Yu Gothic UI" pitchFamily="34" charset="-122"/>
                 <a:cs typeface="Yu Gothic UI" pitchFamily="34" charset="-120"/>
               </a:rPr>
-              <a:t>各ルールに RULE-001 などの一意ID。</a:t>
+              <a:t>申込前に "どの会社なら通るか" をAIで見立てること。</a:t>
             </a:r>
             <a:pPr indent="0" marL="0">
               <a:spcAft>
@@ -2581,7 +2581,7 @@
                 <a:ea typeface="Yu Gothic UI" pitchFamily="34" charset="-122"/>
                 <a:cs typeface="Yu Gothic UI" pitchFamily="34" charset="-120"/>
               </a:rPr>
-              <a:t>判定結果の監査に使う。</a:t>
+              <a:t>謝絶体験を減らす。</a:t>
             </a:r>
             <a:endParaRPr lang="en-US" sz="1600" dirty="0"/>
           </a:p>
@@ -2689,7 +2689,7 @@
                 <a:ea typeface="Yu Gothic UI Semibold" pitchFamily="34" charset="-122"/>
                 <a:cs typeface="Yu Gothic UI Semibold" pitchFamily="34" charset="-120"/>
               </a:rPr>
-              <a:t>根拠列</a:t>
+              <a:t>代替候補社</a:t>
             </a:r>
             <a:endParaRPr lang="en-US" sz="1600" dirty="0"/>
           </a:p>
@@ -2731,7 +2731,7 @@
                 <a:ea typeface="Yu Gothic UI" pitchFamily="34" charset="-122"/>
                 <a:cs typeface="Yu Gothic UI" pitchFamily="34" charset="-120"/>
               </a:rPr>
-              <a:t>内規条項/パンフ/メール引用/口伝など、判定の裏付けを明記。</a:t>
+              <a:t>ある会社で NG になった時に "この会社なら通るかも" と提示できる別会社の商品。</a:t>
             </a:r>
             <a:endParaRPr lang="en-US" sz="1600" dirty="0"/>
           </a:p>
@@ -2839,7 +2839,7 @@
                 <a:ea typeface="Yu Gothic UI Semibold" pitchFamily="34" charset="-122"/>
                 <a:cs typeface="Yu Gothic UI Semibold" pitchFamily="34" charset="-120"/>
               </a:rPr>
-              <a:t>更新ログ</a:t>
+              <a:t>情報源列(口伝を含む)</a:t>
             </a:r>
             <a:endParaRPr lang="en-US" sz="1600" dirty="0"/>
           </a:p>
@@ -2881,24 +2881,7 @@
                 <a:ea typeface="Yu Gothic UI" pitchFamily="34" charset="-122"/>
                 <a:cs typeface="Yu Gothic UI" pitchFamily="34" charset="-120"/>
               </a:rPr>
-              <a:t>マスタ表の変更履歴を残すシート。</a:t>
-            </a:r>
-            <a:pPr indent="0" marL="0">
-              <a:spcAft>
-                <a:spcPts val="600"/>
-              </a:spcAft>
-              <a:buNone/>
-            </a:pPr>
-            <a:r>
-              <a:rPr lang="en-US" sz="1600" dirty="0">
-                <a:solidFill>
-                  <a:srgbClr val="1A1A1A"/>
-                </a:solidFill>
-                <a:latin typeface="Yu Gothic UI" pitchFamily="34" charset="0"/>
-                <a:ea typeface="Yu Gothic UI" pitchFamily="34" charset="-122"/>
-                <a:cs typeface="Yu Gothic UI" pitchFamily="34" charset="-120"/>
-              </a:rPr>
-              <a:t>月1回15分の見直しで記入。</a:t>
+              <a:t>各社研修§/営業担当メール/先輩口伝/過去申込 など、聞いた相手ごとに記録。</a:t>
             </a:r>
             <a:endParaRPr lang="en-US" sz="1600" dirty="0"/>
           </a:p>
@@ -2965,7 +2948,7 @@
                 <a:ea typeface="Yu Gothic UI" pitchFamily="34" charset="-122"/>
                 <a:cs typeface="Yu Gothic UI" pitchFamily="34" charset="-120"/>
               </a:rPr>
-              <a:t>全ナレッジの統合先   </a:t>
+              <a:t>代理店の生命線   </a:t>
             </a:r>
             <a:pPr indent="0" marL="0">
               <a:buNone/>
@@ -2993,7 +2976,7 @@
                 <a:ea typeface="Yu Gothic UI" pitchFamily="34" charset="-122"/>
                 <a:cs typeface="Yu Gothic UI" pitchFamily="34" charset="-120"/>
               </a:rPr>
-              <a:t>条件ID: </a:t>
+              <a:t>事前スクリーニング: </a:t>
             </a:r>
             <a:pPr indent="0" marL="0">
               <a:buNone/>
@@ -3007,7 +2990,7 @@
                 <a:ea typeface="Yu Gothic UI" pitchFamily="34" charset="-122"/>
                 <a:cs typeface="Yu Gothic UI" pitchFamily="34" charset="-120"/>
               </a:rPr>
-              <a:t>削除より "無効化" 推奨   </a:t>
+              <a:t>代理店の付加価値   </a:t>
             </a:r>
             <a:pPr indent="0" marL="0">
               <a:buNone/>
@@ -3035,7 +3018,7 @@
                 <a:ea typeface="Yu Gothic UI" pitchFamily="34" charset="-122"/>
                 <a:cs typeface="Yu Gothic UI" pitchFamily="34" charset="-120"/>
               </a:rPr>
-              <a:t>根拠列: </a:t>
+              <a:t>代替候補社: </a:t>
             </a:r>
             <a:pPr indent="0" marL="0">
               <a:buNone/>
@@ -3049,7 +3032,7 @@
                 <a:ea typeface="Yu Gothic UI" pitchFamily="34" charset="-122"/>
                 <a:cs typeface="Yu Gothic UI" pitchFamily="34" charset="-120"/>
               </a:rPr>
-              <a:t>"口伝" もそのまま書く   </a:t>
+              <a:t>マスタの H列   </a:t>
             </a:r>
             <a:pPr indent="0" marL="0">
               <a:buNone/>
@@ -3077,7 +3060,7 @@
                 <a:ea typeface="Yu Gothic UI" pitchFamily="34" charset="-122"/>
                 <a:cs typeface="Yu Gothic UI" pitchFamily="34" charset="-120"/>
               </a:rPr>
-              <a:t>更新ログ: </a:t>
+              <a:t>情報源列(口伝を含む): </a:t>
             </a:r>
             <a:pPr indent="0" marL="0">
               <a:buNone/>
@@ -3091,7 +3074,7 @@
                 <a:ea typeface="Yu Gothic UI" pitchFamily="34" charset="-122"/>
                 <a:cs typeface="Yu Gothic UI" pitchFamily="34" charset="-120"/>
               </a:rPr>
-              <a:t>削除より無効化</a:t>
+              <a:t>"口伝" もそのまま書く</a:t>
             </a:r>
             <a:endParaRPr lang="en-US" sz="1100" dirty="0"/>
           </a:p>
@@ -3182,7 +3165,7 @@
                 <a:ea typeface="Yu Gothic UI Semibold" pitchFamily="34" charset="-122"/>
                 <a:cs typeface="Yu Gothic UI Semibold" pitchFamily="34" charset="-120"/>
               </a:rPr>
-              <a:t>演習1 散在ナレッジを「マスタ表」10列に整理する</a:t>
+              <a:t>演習1 散在ナレッジを 代理店マスタ表 10列に統合</a:t>
             </a:r>
             <a:endParaRPr lang="en-US" sz="2600" dirty="0"/>
           </a:p>
@@ -3310,7 +3293,7 @@
                 <a:ea typeface="Yu Gothic UI" pitchFamily="34" charset="-122"/>
                 <a:cs typeface="Yu Gothic UI" pitchFamily="34" charset="-120"/>
               </a:rPr>
-              <a:t>引受判定のルールが、口伝メモ/Slack/旧マニュアル/雑Excel/QAメール/商品パンフ に散らばっている。</a:t>
+              <a:t>各社の引受基準が 先輩口伝 / 各社営業担当チャット / A社研修資料 / 過去申込メモ(雑Excel) / QAメール / 各社パンフ に散らばっている。</a:t>
             </a:r>
             <a:endParaRPr lang="en-US" sz="1400" dirty="0"/>
           </a:p>
@@ -3479,7 +3462,7 @@
                 <a:ea typeface="Yu Gothic UI" pitchFamily="34" charset="-122"/>
                 <a:cs typeface="Yu Gothic UI" pitchFamily="34" charset="-120"/>
               </a:rPr>
-              <a:t>ナレッジは形式バラバラ、そのままAIに渡しても判定できないから "共通の型" に揃える</a:t>
+              <a:t>ナレッジは形式バラバラ、そのままAIに渡しても "会社比較" ができないから "共通の型" に揃える</a:t>
             </a:r>
             <a:endParaRPr lang="en-US" sz="1400" dirty="0"/>
           </a:p>
@@ -3500,7 +3483,7 @@
                 <a:ea typeface="Yu Gothic UI" pitchFamily="34" charset="-122"/>
                 <a:cs typeface="Yu Gothic UI" pitchFamily="34" charset="-120"/>
               </a:rPr>
-              <a:t>曖昧な口伝(「田中課長が言ってた」)も根拠列に残す(後で正式化するため)</a:t>
+              <a:t>「A社NG / B社要確認」のような会社差は、H列(対応)に "代替: B社なら通る可能性" と書き残す</a:t>
             </a:r>
             <a:endParaRPr lang="en-US" sz="1400" dirty="0"/>
           </a:p>
@@ -3521,7 +3504,7 @@
                 <a:ea typeface="Yu Gothic UI" pitchFamily="34" charset="-122"/>
                 <a:cs typeface="Yu Gothic UI" pitchFamily="34" charset="-120"/>
               </a:rPr>
-              <a:t>条件詳細列は "年齢/健康/職業/金額" のどの軸か明確に書く</a:t>
+              <a:t>曖昧な口伝(「山田さんが言ってた」)も情報源列に残す(後で会社に確認する目印)</a:t>
             </a:r>
             <a:endParaRPr lang="en-US" sz="1400" dirty="0"/>
           </a:p>
@@ -3542,7 +3525,7 @@
                 <a:ea typeface="Yu Gothic UI" pitchFamily="34" charset="-122"/>
                 <a:cs typeface="Yu Gothic UI" pitchFamily="34" charset="-120"/>
               </a:rPr>
-              <a:t>判定理由は "経験上" ではなく "○○のため" と1文で</a:t>
+              <a:t>過去申込結果メモ(雑Excel)の実案件も 情報源として使えると強い</a:t>
             </a:r>
             <a:endParaRPr lang="en-US" sz="1400" dirty="0"/>
           </a:p>
@@ -3671,7 +3654,7 @@
                 <a:ea typeface="Yu Gothic UI" pitchFamily="34" charset="-122"/>
                 <a:cs typeface="Yu Gothic UI" pitchFamily="34" charset="-120"/>
               </a:rPr>
-              <a:t>スプシ「引受判定マスタ」テンプレを開く(10列: ID/カテゴリ/対象商品/条件詳細/判定/理由/追加確認or代替案/エスカレ先/根拠/更新日)</a:t>
+              <a:t>スプシ「引受判定マスタ」テンプレを開く(10列: ID/カテゴリ/保険会社/商品ジャンル/条件詳細/判定/理由/対応or代替候補社/情報源/更新日)</a:t>
             </a:r>
             <a:endParaRPr lang="en-US" sz="1400" dirty="0"/>
           </a:p>
@@ -3692,7 +3675,7 @@
                 <a:ea typeface="Yu Gothic UI" pitchFamily="34" charset="-122"/>
                 <a:cs typeface="Yu Gothic UI" pitchFamily="34" charset="-120"/>
               </a:rPr>
-              <a:t>別シート「引受判定マスタ_記入例」で完成イメージを掴む</a:t>
+              <a:t>別シート「引受判定マスタ_記入例」で完成イメージを掴む(会社別の色分けあり)</a:t>
             </a:r>
             <a:endParaRPr lang="en-US" sz="1400" dirty="0"/>
           </a:p>
@@ -3734,7 +3717,7 @@
                 <a:ea typeface="Yu Gothic UI" pitchFamily="34" charset="-122"/>
                 <a:cs typeface="Yu Gothic UI" pitchFamily="34" charset="-120"/>
               </a:rPr>
-              <a:t>同じ条件が複数ナレッジに登場したら 1行に統合、根拠列に両方書く</a:t>
+              <a:t>同じ条件でも会社で判定が違う場合は 別々の行に(横並びで比較できる形)</a:t>
             </a:r>
             <a:endParaRPr lang="en-US" sz="1400" dirty="0"/>
           </a:p>
@@ -3846,7 +3829,7 @@
                 <a:ea typeface="Yu Gothic UI Semibold" pitchFamily="34" charset="-122"/>
                 <a:cs typeface="Yu Gothic UI Semibold" pitchFamily="34" charset="-120"/>
               </a:rPr>
-              <a:t>演習1 散在ナレッジを「マスタ表」10列に整理する — 観点別チェック</a:t>
+              <a:t>演習1 散在ナレッジを 代理店マスタ表 10列に統合 — 観点別チェック</a:t>
             </a:r>
             <a:endParaRPr lang="en-US" sz="2600" dirty="0"/>
           </a:p>
@@ -4010,7 +3993,7 @@
                 <a:ea typeface="Yu Gothic UI Semibold" pitchFamily="34" charset="-122"/>
                 <a:cs typeface="Yu Gothic UI Semibold" pitchFamily="34" charset="-120"/>
               </a:rPr>
-              <a:t>A. 統合の一貫性</a:t>
+              <a:t>A. 会社軸での整理</a:t>
             </a:r>
             <a:endParaRPr lang="en-US" sz="1500" dirty="0"/>
           </a:p>
@@ -4063,7 +4046,7 @@
                 <a:ea typeface="Yu Gothic UI" pitchFamily="34" charset="-122"/>
                 <a:cs typeface="Yu Gothic UI" pitchFamily="34" charset="-120"/>
               </a:rPr>
-              <a:t>同じ条件が複数ナレッジに出てきた時、1行に統合したか</a:t>
+              <a:t>同じ条件でも会社で判定違う場合、1行に無理やり統合せず 別々の行になっているか</a:t>
             </a:r>
             <a:endParaRPr lang="en-US" sz="1300" dirty="0"/>
           </a:p>
@@ -4116,7 +4099,7 @@
                 <a:ea typeface="Yu Gothic UI" pitchFamily="34" charset="-122"/>
                 <a:cs typeface="Yu Gothic UI" pitchFamily="34" charset="-120"/>
               </a:rPr>
-              <a:t>重複行が3個以上残っていたら要見直し(カテゴリでソートすると重複が見える)</a:t>
+              <a:t>A社行と B社行を隣り合わせに並べてみて、比較できるか確認</a:t>
             </a:r>
             <a:endParaRPr lang="en-US" sz="1300" dirty="0"/>
           </a:p>
@@ -4241,7 +4224,7 @@
                 <a:ea typeface="Yu Gothic UI Semibold" pitchFamily="34" charset="-122"/>
                 <a:cs typeface="Yu Gothic UI Semibold" pitchFamily="34" charset="-120"/>
               </a:rPr>
-              <a:t>B. 根拠の明記</a:t>
+              <a:t>B. 情報源の明記</a:t>
             </a:r>
             <a:endParaRPr lang="en-US" sz="1500" dirty="0"/>
           </a:p>
@@ -4294,7 +4277,7 @@
                 <a:ea typeface="Yu Gothic UI" pitchFamily="34" charset="-122"/>
                 <a:cs typeface="Yu Gothic UI" pitchFamily="34" charset="-120"/>
               </a:rPr>
-              <a:t>根拠列に "誰が言った/どの文書" が全行に入っているか</a:t>
+              <a:t>情報源列に "どの会社の誰から/どの文書" が全行に入っているか</a:t>
             </a:r>
             <a:endParaRPr lang="en-US" sz="1300" dirty="0"/>
           </a:p>
@@ -4347,7 +4330,7 @@
                 <a:ea typeface="Yu Gothic UI" pitchFamily="34" charset="-122"/>
                 <a:cs typeface="Yu Gothic UI" pitchFamily="34" charset="-120"/>
               </a:rPr>
-              <a:t>空欄行があったら "口伝(要正式化)" と書かせる</a:t>
+              <a:t>空欄行があったら "先輩口伝(要正式化)" と書かせる</a:t>
             </a:r>
             <a:endParaRPr lang="en-US" sz="1300" dirty="0"/>
           </a:p>
@@ -4472,7 +4455,7 @@
                 <a:ea typeface="Yu Gothic UI Semibold" pitchFamily="34" charset="-122"/>
                 <a:cs typeface="Yu Gothic UI Semibold" pitchFamily="34" charset="-120"/>
               </a:rPr>
-              <a:t>C. 判定理由の言語化</a:t>
+              <a:t>C. 代替候補社の記述</a:t>
             </a:r>
             <a:endParaRPr lang="en-US" sz="1500" dirty="0"/>
           </a:p>
@@ -4525,7 +4508,7 @@
                 <a:ea typeface="Yu Gothic UI" pitchFamily="34" charset="-122"/>
                 <a:cs typeface="Yu Gothic UI" pitchFamily="34" charset="-120"/>
               </a:rPr>
-              <a:t>理由が "経験上" "なんとなく" になっていないか</a:t>
+              <a:t>NG判定の行に "代替: 〇社なら通る可能性" が書けているか</a:t>
             </a:r>
             <a:endParaRPr lang="en-US" sz="1300" dirty="0"/>
           </a:p>
@@ -4578,7 +4561,7 @@
                 <a:ea typeface="Yu Gothic UI" pitchFamily="34" charset="-122"/>
                 <a:cs typeface="Yu Gothic UI" pitchFamily="34" charset="-120"/>
               </a:rPr>
-              <a:t>「○○の可能性があるため」「規定§〇〇により」と1文で書けているか目視</a:t>
+              <a:t>"NG → 終わり" ではなく "NG → 別会社の代替提案" が代理店の付加価値と伝える</a:t>
             </a:r>
             <a:endParaRPr lang="en-US" sz="1300" dirty="0"/>
           </a:p>
@@ -4669,7 +4652,7 @@
                 <a:ea typeface="Yu Gothic UI Semibold" pitchFamily="34" charset="-122"/>
                 <a:cs typeface="Yu Gothic UI Semibold" pitchFamily="34" charset="-120"/>
               </a:rPr>
-              <a:t>演習2 マスタ表を使った一次判定 と 更新運用</a:t>
+              <a:t>演習2 "どの会社なら通る?" AI一次判定 と 更新運用</a:t>
             </a:r>
             <a:endParaRPr lang="en-US" sz="2600" dirty="0"/>
           </a:p>
@@ -4797,7 +4780,7 @@
                 <a:ea typeface="Yu Gothic UI" pitchFamily="34" charset="-122"/>
                 <a:cs typeface="Yu Gothic UI" pitchFamily="34" charset="-120"/>
               </a:rPr>
-              <a:t>整理したマスタ表を Gemini に読ませて、顧客情報 → YES/NO/要確認 の一次判定ができるか試す。</a:t>
+              <a:t>整理したマスタ表を Gemini に読ませて、顧客情報 → 会社別の一次判定 ができるか試す。</a:t>
             </a:r>
             <a:endParaRPr lang="en-US" sz="1400" dirty="0"/>
           </a:p>
@@ -4817,7 +4800,27 @@
                 <a:ea typeface="Yu Gothic UI" pitchFamily="34" charset="-122"/>
                 <a:cs typeface="Yu Gothic UI" pitchFamily="34" charset="-120"/>
               </a:rPr>
-              <a:t>あわせて「更新ログ」シートを埋めて、月次で見直せる仕組みを完成させる。</a:t>
+              <a:t>「A社NG / B社要確認 / D社ライトなら通るかも」のような 代理店らしい "見立て" を返させる。</a:t>
+            </a:r>
+            <a:endParaRPr lang="en-US" sz="1400" dirty="0"/>
+          </a:p>
+          <a:p>
+            <a:pPr indent="0" marL="0">
+              <a:spcAft>
+                <a:spcPts val="400"/>
+              </a:spcAft>
+              <a:buNone/>
+            </a:pPr>
+            <a:r>
+              <a:rPr lang="en-US" sz="1400" dirty="0">
+                <a:solidFill>
+                  <a:srgbClr val="1A1A1A"/>
+                </a:solidFill>
+                <a:latin typeface="Yu Gothic UI" pitchFamily="34" charset="0"/>
+                <a:ea typeface="Yu Gothic UI" pitchFamily="34" charset="-122"/>
+                <a:cs typeface="Yu Gothic UI" pitchFamily="34" charset="-120"/>
+              </a:rPr>
+              <a:t>あわせて「更新ログ」シートを埋めて、月次で各社の商品改定情報を追える仕組みに。</a:t>
             </a:r>
             <a:endParaRPr lang="en-US" sz="1400" dirty="0"/>
           </a:p>
@@ -4946,7 +4949,7 @@
                 <a:ea typeface="Yu Gothic UI" pitchFamily="34" charset="-122"/>
                 <a:cs typeface="Yu Gothic UI" pitchFamily="34" charset="-120"/>
               </a:rPr>
-              <a:t>Gemini に「以下のマスタ表(CSV)を判定ルールとして使って」と明示</a:t>
+              <a:t>Gemini に「あなたは保険代理店の事前引受スクリーニングAIです」と役割を明示</a:t>
             </a:r>
             <a:endParaRPr lang="en-US" sz="1400" dirty="0"/>
           </a:p>
@@ -4967,7 +4970,7 @@
                 <a:ea typeface="Yu Gothic UI" pitchFamily="34" charset="-122"/>
                 <a:cs typeface="Yu Gothic UI" pitchFamily="34" charset="-120"/>
               </a:rPr>
-              <a:t>該当なしの場合は「該当なし → 要確認(人が判定)」を返すよう指示に含める</a:t>
+              <a:t>出力に "参照した条件ID" と "会社名" を必ず含めさせる(監査可能に)</a:t>
             </a:r>
             <a:endParaRPr lang="en-US" sz="1400" dirty="0"/>
           </a:p>
@@ -4988,7 +4991,7 @@
                 <a:ea typeface="Yu Gothic UI" pitchFamily="34" charset="-122"/>
                 <a:cs typeface="Yu Gothic UI" pitchFamily="34" charset="-120"/>
               </a:rPr>
-              <a:t>更新は "削除" ではなく "無効化列" で運用(履歴が消えないように)</a:t>
+              <a:t>該当なしは「各社支社に事前相談要」でフォールバック(勝手にYESと出させない)</a:t>
             </a:r>
             <a:endParaRPr lang="en-US" sz="1400" dirty="0"/>
           </a:p>
@@ -5009,7 +5012,7 @@
                 <a:ea typeface="Yu Gothic UI" pitchFamily="34" charset="-122"/>
                 <a:cs typeface="Yu Gothic UI" pitchFamily="34" charset="-120"/>
               </a:rPr>
-              <a:t>見直し会議は月1回15分でOK、続くことが最重要</a:t>
+              <a:t>更新は "削除" ではなく "無効化" で運用(過去顧客への説明時に必要)</a:t>
             </a:r>
             <a:endParaRPr lang="en-US" sz="1400" dirty="0"/>
           </a:p>
@@ -5138,7 +5141,7 @@
                 <a:ea typeface="Yu Gothic UI" pitchFamily="34" charset="-122"/>
                 <a:cs typeface="Yu Gothic UI" pitchFamily="34" charset="-120"/>
               </a:rPr>
-              <a:t>マスタ表をCSV形式で Gemini に渡し、顧客情報3件 → 一次判定を実行</a:t>
+              <a:t>マスタ表をCSV形式で Gemini に渡し、顧客情報3件 → 会社別の一次判定を実行</a:t>
             </a:r>
             <a:endParaRPr lang="en-US" sz="1400" dirty="0"/>
           </a:p>
@@ -5159,7 +5162,7 @@
                 <a:ea typeface="Yu Gothic UI" pitchFamily="34" charset="-122"/>
                 <a:cs typeface="Yu Gothic UI" pitchFamily="34" charset="-120"/>
               </a:rPr>
-              <a:t>判定結果に「参照した条件ID」「判定」「理由」「次のアクション」の4要素を出力させる</a:t>
+              <a:t>判定結果に「通りそうな会社(YES) / 要確認で相談推奨 / NG会社 / 代替提案 / 次のアクション」を出力させる</a:t>
             </a:r>
             <a:endParaRPr lang="en-US" sz="1400" dirty="0"/>
           </a:p>
@@ -5180,7 +5183,7 @@
                 <a:ea typeface="Yu Gothic UI" pitchFamily="34" charset="-122"/>
                 <a:cs typeface="Yu Gothic UI" pitchFamily="34" charset="-120"/>
               </a:rPr>
-              <a:t>該当ルールがない顧客を試す →「該当なし → 要確認」で返ることを確認</a:t>
+              <a:t>該当ルールがない顧客を試す →「該当なし → 各社支社に事前相談要」で返ることを確認</a:t>
             </a:r>
             <a:endParaRPr lang="en-US" sz="1400" dirty="0"/>
           </a:p>
@@ -5201,7 +5204,7 @@
                 <a:ea typeface="Yu Gothic UI" pitchFamily="34" charset="-122"/>
                 <a:cs typeface="Yu Gothic UI" pitchFamily="34" charset="-120"/>
               </a:rPr>
-              <a:t>「更新ログ」シートに ダミー更新を2件 記入(追加/修正/無効化 の練習)</a:t>
+              <a:t>「更新ログ」シートに ダミー更新を2件 記入(各社の商品改定を反映する練習)</a:t>
             </a:r>
             <a:endParaRPr lang="en-US" sz="1400" dirty="0"/>
           </a:p>
@@ -5313,7 +5316,7 @@
                 <a:ea typeface="Yu Gothic UI Semibold" pitchFamily="34" charset="-122"/>
                 <a:cs typeface="Yu Gothic UI Semibold" pitchFamily="34" charset="-120"/>
               </a:rPr>
-              <a:t>演習2 マスタ表を使った一次判定 と 更新運用 — 観点別チェック</a:t>
+              <a:t>演習2 "どの会社なら通る?" AI一次判定 と 更新運用 — 観点別チェック</a:t>
             </a:r>
             <a:endParaRPr lang="en-US" sz="2600" dirty="0"/>
           </a:p>
@@ -5477,7 +5480,7 @@
                 <a:ea typeface="Yu Gothic UI Semibold" pitchFamily="34" charset="-122"/>
                 <a:cs typeface="Yu Gothic UI Semibold" pitchFamily="34" charset="-120"/>
               </a:rPr>
-              <a:t>A. ルール参照の明示</a:t>
+              <a:t>A. 会社別の見立て</a:t>
             </a:r>
             <a:endParaRPr lang="en-US" sz="1500" dirty="0"/>
           </a:p>
@@ -5530,7 +5533,7 @@
                 <a:ea typeface="Yu Gothic UI" pitchFamily="34" charset="-122"/>
                 <a:cs typeface="Yu Gothic UI" pitchFamily="34" charset="-120"/>
               </a:rPr>
-              <a:t>AI が判定時にどの条件ID を参照したか出力させているか</a:t>
+              <a:t>出力に "A社 / B社 / D社..." のように 会社別の判定 が並んでいるか</a:t>
             </a:r>
             <a:endParaRPr lang="en-US" sz="1300" dirty="0"/>
           </a:p>
@@ -5583,7 +5586,7 @@
                 <a:ea typeface="Yu Gothic UI" pitchFamily="34" charset="-122"/>
                 <a:cs typeface="Yu Gothic UI" pitchFamily="34" charset="-120"/>
               </a:rPr>
-              <a:t>出力に "参照ID: RULE-XXX" が入っているか確認</a:t>
+              <a:t>「YESの会社 / 要確認の会社 / NGの会社 / 代替提案」の4区分で出力させる</a:t>
             </a:r>
             <a:endParaRPr lang="en-US" sz="1300" dirty="0"/>
           </a:p>
@@ -5761,7 +5764,7 @@
                 <a:ea typeface="Yu Gothic UI" pitchFamily="34" charset="-122"/>
                 <a:cs typeface="Yu Gothic UI" pitchFamily="34" charset="-120"/>
               </a:rPr>
-              <a:t>マスタにない条件が来た時 "要確認" にフォールバックしているか</a:t>
+              <a:t>マスタにない条件で "自動YES" にせず "各社支社に事前相談要" になるか</a:t>
             </a:r>
             <a:endParaRPr lang="en-US" sz="1300" dirty="0"/>
           </a:p>
@@ -5814,7 +5817,7 @@
                 <a:ea typeface="Yu Gothic UI" pitchFamily="34" charset="-122"/>
                 <a:cs typeface="Yu Gothic UI" pitchFamily="34" charset="-120"/>
               </a:rPr>
-              <a:t>テスト: マスタにない条件で "自動 YES" になっていないか(逆に危険)</a:t>
+              <a:t>テスト: 「パラグライダー競技選手 / 死亡保険」で確認</a:t>
             </a:r>
             <a:endParaRPr lang="en-US" sz="1300" dirty="0"/>
           </a:p>
@@ -5992,7 +5995,7 @@
                 <a:ea typeface="Yu Gothic UI" pitchFamily="34" charset="-122"/>
                 <a:cs typeface="Yu Gothic UI" pitchFamily="34" charset="-120"/>
               </a:rPr>
-              <a:t>更新ログの記入と月次見直しが仕組みとして回るか</a:t>
+              <a:t>各社の商品改定を追える仕組みが決まったか</a:t>
             </a:r>
             <a:endParaRPr lang="en-US" sz="1300" dirty="0"/>
           </a:p>
@@ -6045,7 +6048,7 @@
                 <a:ea typeface="Yu Gothic UI" pitchFamily="34" charset="-122"/>
                 <a:cs typeface="Yu Gothic UI" pitchFamily="34" charset="-120"/>
               </a:rPr>
-              <a:t>担当者名/曜日まで決めさせる(「田中さんが毎月第1金曜」等)</a:t>
+              <a:t>担当者名/曜日まで決めさせる(「田中さんが毎月第1金曜、各社営業担当に一斉ヒアリング」等)</a:t>
             </a:r>
             <a:endParaRPr lang="en-US" sz="1300" dirty="0"/>
           </a:p>
@@ -6241,7 +6244,7 @@
                 <a:ea typeface="Yu Gothic UI Semibold" pitchFamily="34" charset="-122"/>
                 <a:cs typeface="Yu Gothic UI Semibold" pitchFamily="34" charset="-120"/>
               </a:rPr>
-              <a:t>散在ナレッジを1表に集約</a:t>
+              <a:t>各社の基準を1つの表に</a:t>
             </a:r>
             <a:endParaRPr lang="en-US" sz="1800" dirty="0"/>
           </a:p>
@@ -6280,7 +6283,7 @@
                 <a:ea typeface="Yu Gothic UI" pitchFamily="34" charset="-122"/>
                 <a:cs typeface="Yu Gothic UI" pitchFamily="34" charset="-120"/>
               </a:rPr>
-              <a:t>口伝/チャット/旧文書 → マスタ表10列。AIが読める共通型に。</a:t>
+              <a:t>各社バラバラの引受基準を 代理店マスタ表10列に集約。会社比較が瞬時にできる状態。</a:t>
             </a:r>
             <a:endParaRPr lang="en-US" sz="1300" dirty="0"/>
           </a:p>
@@ -6385,7 +6388,7 @@
                 <a:ea typeface="Yu Gothic UI Semibold" pitchFamily="34" charset="-122"/>
                 <a:cs typeface="Yu Gothic UI Semibold" pitchFamily="34" charset="-120"/>
               </a:rPr>
-              <a:t>更新と根拠が追える</a:t>
+              <a:t>"どこなら通る?" が言える</a:t>
             </a:r>
             <a:endParaRPr lang="en-US" sz="1800" dirty="0"/>
           </a:p>
@@ -6424,7 +6427,7 @@
                 <a:ea typeface="Yu Gothic UI" pitchFamily="34" charset="-122"/>
                 <a:cs typeface="Yu Gothic UI" pitchFamily="34" charset="-120"/>
               </a:rPr>
-              <a:t>更新ログ+根拠列で、"なぜこの判定?" にいつでも答えられる。</a:t>
+              <a:t>NG会社と代替候補社が並んで見える。お客様に "無駄な申込" をさせない。</a:t>
             </a:r>
             <a:endParaRPr lang="en-US" sz="1300" dirty="0"/>
           </a:p>
@@ -6529,7 +6532,7 @@
                 <a:ea typeface="Yu Gothic UI Semibold" pitchFamily="34" charset="-122"/>
                 <a:cs typeface="Yu Gothic UI Semibold" pitchFamily="34" charset="-120"/>
               </a:rPr>
-              <a:t>一次判定は AI, 最終は人</a:t>
+              <a:t>AI が一次スクリーニング, 最終判定は各社</a:t>
             </a:r>
             <a:endParaRPr lang="en-US" sz="1800" dirty="0"/>
           </a:p>
@@ -6568,7 +6571,7 @@
                 <a:ea typeface="Yu Gothic UI" pitchFamily="34" charset="-122"/>
                 <a:cs typeface="Yu Gothic UI" pitchFamily="34" charset="-120"/>
               </a:rPr>
-              <a:t>判定結果に条件IDを付けて、人がいつでも監査できる状態。</a:t>
+              <a:t>事前スクリーニングで謝絶体験を減らす。最終は各保険会社の査定に委ねる。</a:t>
             </a:r>
             <a:endParaRPr lang="en-US" sz="1300" dirty="0"/>
           </a:p>

--- a/lecture_pptx/out/s15/ワーク01.pptx
+++ b/lecture_pptx/out/s15/ワーク01.pptx
@@ -1551,7 +1551,7 @@
                 <a:ea typeface="Yu Gothic UI Semibold" pitchFamily="34" charset="-122"/>
                 <a:cs typeface="Yu Gothic UI Semibold" pitchFamily="34" charset="-120"/>
               </a:rPr>
-              <a:t>代理店の "事前引受スクリーニング" を マスタ表化する</a:t>
+              <a:t>扱い商品ごとの "引受判定" マスタ表を作る</a:t>
             </a:r>
             <a:endParaRPr lang="en-US" sz="3800" dirty="0"/>
           </a:p>
@@ -1590,7 +1590,7 @@
                 <a:ea typeface="Yu Gothic UI" pitchFamily="34" charset="-122"/>
                 <a:cs typeface="Yu Gothic UI" pitchFamily="34" charset="-120"/>
               </a:rPr>
-              <a:t>扱う各社の引受基準を1つの表に整理し、AIで "どの会社なら通りそうか" を申込前に見立てる</a:t>
+              <a:t>代理店が扱う商品ごとに引受条件をメモ集約し、"この顧客はこの商品で通るか?" を AI で申込前に判定する</a:t>
             </a:r>
             <a:endParaRPr lang="en-US" sz="1900" dirty="0"/>
           </a:p>
@@ -1806,7 +1806,7 @@
                 <a:ea typeface="Yu Gothic UI Semibold" pitchFamily="34" charset="-122"/>
                 <a:cs typeface="Yu Gothic UI Semibold" pitchFamily="34" charset="-120"/>
               </a:rPr>
-              <a:t>各社の基準を1つの表に集約</a:t>
+              <a:t>商品ごとの条件を1つの表に</a:t>
             </a:r>
             <a:endParaRPr lang="en-US" sz="1700" dirty="0"/>
           </a:p>
@@ -1845,7 +1845,7 @@
                 <a:ea typeface="Yu Gothic UI" pitchFamily="34" charset="-122"/>
                 <a:cs typeface="Yu Gothic UI" pitchFamily="34" charset="-120"/>
               </a:rPr>
-              <a:t>先輩口伝/各社営業チャット/A社研修/過去申込メモ/QAメール/各社パンフ をマスタ表(10列)に統合</a:t>
+              <a:t>先輩口伝/商品担当チャット/研修/過去謝絶メモ/QAメール/商品パンフ をマスタ表(10列)に統合</a:t>
             </a:r>
             <a:endParaRPr lang="en-US" sz="1300" dirty="0"/>
           </a:p>
@@ -1970,7 +1970,7 @@
                 <a:ea typeface="Yu Gothic UI Semibold" pitchFamily="34" charset="-122"/>
                 <a:cs typeface="Yu Gothic UI Semibold" pitchFamily="34" charset="-120"/>
               </a:rPr>
-              <a:t>"どの会社が通る?" が見える形へ</a:t>
+              <a:t>"この商品なら通る?" が判る形へ</a:t>
             </a:r>
             <a:endParaRPr lang="en-US" sz="1700" dirty="0"/>
           </a:p>
@@ -2009,7 +2009,7 @@
                 <a:ea typeface="Yu Gothic UI" pitchFamily="34" charset="-122"/>
                 <a:cs typeface="Yu Gothic UI" pitchFamily="34" charset="-120"/>
               </a:rPr>
-              <a:t>同じ条件でも会社ごとに判定が違うのを 横並びで比較できる形にする</a:t>
+              <a:t>商品名でソート/フィルタして、商品カルテとして機能する状態にする</a:t>
             </a:r>
             <a:endParaRPr lang="en-US" sz="1300" dirty="0"/>
           </a:p>
@@ -2173,7 +2173,7 @@
                 <a:ea typeface="Yu Gothic UI" pitchFamily="34" charset="-122"/>
                 <a:cs typeface="Yu Gothic UI" pitchFamily="34" charset="-120"/>
               </a:rPr>
-              <a:t>マスタ表を Gemini に渡し "会社別の見立て" を返す + 月1回15分の見直し</a:t>
+              <a:t>マスタ表を Gemini に渡し 顧客×商品 で判定 + 月1回15分の見直し</a:t>
             </a:r>
             <a:endParaRPr lang="en-US" sz="1300" dirty="0"/>
           </a:p>
@@ -2414,7 +2414,7 @@
                 <a:ea typeface="Yu Gothic UI" pitchFamily="34" charset="-122"/>
                 <a:cs typeface="Yu Gothic UI" pitchFamily="34" charset="-120"/>
               </a:rPr>
-              <a:t>各社の引受基準を 1行 = 1(条件×会社×商品ジャンル) で管理する共通表(10列)。</a:t>
+              <a:t>扱い商品ごとの引受条件を 1行 = 1(条件×商品) で管理する共通表(10列)。</a:t>
             </a:r>
             <a:endParaRPr lang="en-US" sz="1600" dirty="0"/>
           </a:p>
@@ -2522,7 +2522,7 @@
                 <a:ea typeface="Yu Gothic UI Semibold" pitchFamily="34" charset="-122"/>
                 <a:cs typeface="Yu Gothic UI Semibold" pitchFamily="34" charset="-120"/>
               </a:rPr>
-              <a:t>事前スクリーニング</a:t>
+              <a:t>事前引受判定</a:t>
             </a:r>
             <a:endParaRPr lang="en-US" sz="1600" dirty="0"/>
           </a:p>
@@ -2564,7 +2564,7 @@
                 <a:ea typeface="Yu Gothic UI" pitchFamily="34" charset="-122"/>
                 <a:cs typeface="Yu Gothic UI" pitchFamily="34" charset="-120"/>
               </a:rPr>
-              <a:t>申込前に "どの会社なら通るか" をAIで見立てること。</a:t>
+              <a:t>申込前に "この顧客はこの商品で通るか" をAIで見立てること。</a:t>
             </a:r>
             <a:pPr indent="0" marL="0">
               <a:spcAft>
@@ -2689,7 +2689,7 @@
                 <a:ea typeface="Yu Gothic UI Semibold" pitchFamily="34" charset="-122"/>
                 <a:cs typeface="Yu Gothic UI Semibold" pitchFamily="34" charset="-120"/>
               </a:rPr>
-              <a:t>代替候補社</a:t>
+              <a:t>対応列</a:t>
             </a:r>
             <a:endParaRPr lang="en-US" sz="1600" dirty="0"/>
           </a:p>
@@ -2731,7 +2731,24 @@
                 <a:ea typeface="Yu Gothic UI" pitchFamily="34" charset="-122"/>
                 <a:cs typeface="Yu Gothic UI" pitchFamily="34" charset="-120"/>
               </a:rPr>
-              <a:t>ある会社で NG になった時に "この会社なら通るかも" と提示できる別会社の商品。</a:t>
+              <a:t>NG時の対応(再申込タイミング/代替商品/顧客説明)を書く列。</a:t>
+            </a:r>
+            <a:pPr indent="0" marL="0">
+              <a:spcAft>
+                <a:spcPts val="600"/>
+              </a:spcAft>
+              <a:buNone/>
+            </a:pPr>
+            <a:r>
+              <a:rPr lang="en-US" sz="1600" dirty="0">
+                <a:solidFill>
+                  <a:srgbClr val="1A1A1A"/>
+                </a:solidFill>
+                <a:latin typeface="Yu Gothic UI" pitchFamily="34" charset="0"/>
+                <a:ea typeface="Yu Gothic UI" pitchFamily="34" charset="-122"/>
+                <a:cs typeface="Yu Gothic UI" pitchFamily="34" charset="-120"/>
+              </a:rPr>
+              <a:t>単なる判定で終わらせない。</a:t>
             </a:r>
             <a:endParaRPr lang="en-US" sz="1600" dirty="0"/>
           </a:p>
@@ -2881,7 +2898,7 @@
                 <a:ea typeface="Yu Gothic UI" pitchFamily="34" charset="-122"/>
                 <a:cs typeface="Yu Gothic UI" pitchFamily="34" charset="-120"/>
               </a:rPr>
-              <a:t>各社研修§/営業担当メール/先輩口伝/過去申込 など、聞いた相手ごとに記録。</a:t>
+              <a:t>商品パンフ/研修§/営業担当メール/先輩口伝/過去謝絶案件 など、聞いた相手ごとに記録。</a:t>
             </a:r>
             <a:endParaRPr lang="en-US" sz="1600" dirty="0"/>
           </a:p>
@@ -2948,7 +2965,7 @@
                 <a:ea typeface="Yu Gothic UI" pitchFamily="34" charset="-122"/>
                 <a:cs typeface="Yu Gothic UI" pitchFamily="34" charset="-120"/>
               </a:rPr>
-              <a:t>代理店の生命線   </a:t>
+              <a:t>代理店の商品カルテ   </a:t>
             </a:r>
             <a:pPr indent="0" marL="0">
               <a:buNone/>
@@ -2976,7 +2993,7 @@
                 <a:ea typeface="Yu Gothic UI" pitchFamily="34" charset="-122"/>
                 <a:cs typeface="Yu Gothic UI" pitchFamily="34" charset="-120"/>
               </a:rPr>
-              <a:t>事前スクリーニング: </a:t>
+              <a:t>事前引受判定: </a:t>
             </a:r>
             <a:pPr indent="0" marL="0">
               <a:buNone/>
@@ -3018,7 +3035,7 @@
                 <a:ea typeface="Yu Gothic UI" pitchFamily="34" charset="-122"/>
                 <a:cs typeface="Yu Gothic UI" pitchFamily="34" charset="-120"/>
               </a:rPr>
-              <a:t>代替候補社: </a:t>
+              <a:t>対応列: </a:t>
             </a:r>
             <a:pPr indent="0" marL="0">
               <a:buNone/>
@@ -3165,7 +3182,7 @@
                 <a:ea typeface="Yu Gothic UI Semibold" pitchFamily="34" charset="-122"/>
                 <a:cs typeface="Yu Gothic UI Semibold" pitchFamily="34" charset="-120"/>
               </a:rPr>
-              <a:t>演習1 散在ナレッジを 代理店マスタ表 10列に統合</a:t>
+              <a:t>演習1 散在ナレッジを 商品別マスタ表 10列に統合</a:t>
             </a:r>
             <a:endParaRPr lang="en-US" sz="2600" dirty="0"/>
           </a:p>
@@ -3293,7 +3310,7 @@
                 <a:ea typeface="Yu Gothic UI" pitchFamily="34" charset="-122"/>
                 <a:cs typeface="Yu Gothic UI" pitchFamily="34" charset="-120"/>
               </a:rPr>
-              <a:t>各社の引受基準が 先輩口伝 / 各社営業担当チャット / A社研修資料 / 過去申込メモ(雑Excel) / QAメール / 各社パンフ に散らばっている。</a:t>
+              <a:t>扱い商品ごとの引受条件が 先輩口伝 / 各商品担当チャット / A社研修資料 / 過去謝絶メモ(雑Excel) / QAメール / 各商品パンフ に散らばっている。</a:t>
             </a:r>
             <a:endParaRPr lang="en-US" sz="1400" dirty="0"/>
           </a:p>
@@ -3314,6 +3331,26 @@
                 <a:cs typeface="Yu Gothic UI" pitchFamily="34" charset="-120"/>
               </a:rPr>
               <a:t>同梱の「デモナレッジ 01〜06」を素材に、1つの「引受判定マスタ表」(10列)に統合する。</a:t>
+            </a:r>
+            <a:endParaRPr lang="en-US" sz="1400" dirty="0"/>
+          </a:p>
+          <a:p>
+            <a:pPr indent="0" marL="0">
+              <a:spcAft>
+                <a:spcPts val="400"/>
+              </a:spcAft>
+              <a:buNone/>
+            </a:pPr>
+            <a:r>
+              <a:rPr lang="en-US" sz="1400" dirty="0">
+                <a:solidFill>
+                  <a:srgbClr val="1A1A1A"/>
+                </a:solidFill>
+                <a:latin typeface="Yu Gothic UI" pitchFamily="34" charset="0"/>
+                <a:ea typeface="Yu Gothic UI" pitchFamily="34" charset="-122"/>
+                <a:cs typeface="Yu Gothic UI" pitchFamily="34" charset="-120"/>
+              </a:rPr>
+              <a:t>商品名でソートしたときに 商品カルテ として機能する状態が完成形。</a:t>
             </a:r>
             <a:endParaRPr lang="en-US" sz="1400" dirty="0"/>
           </a:p>
@@ -3462,7 +3499,7 @@
                 <a:ea typeface="Yu Gothic UI" pitchFamily="34" charset="-122"/>
                 <a:cs typeface="Yu Gothic UI" pitchFamily="34" charset="-120"/>
               </a:rPr>
-              <a:t>ナレッジは形式バラバラ、そのままAIに渡しても "会社比較" ができないから "共通の型" に揃える</a:t>
+              <a:t>ナレッジは商品バラバラで書かれているから、まず商品名で分類してから条件を抽出する</a:t>
             </a:r>
             <a:endParaRPr lang="en-US" sz="1400" dirty="0"/>
           </a:p>
@@ -3483,7 +3520,7 @@
                 <a:ea typeface="Yu Gothic UI" pitchFamily="34" charset="-122"/>
                 <a:cs typeface="Yu Gothic UI" pitchFamily="34" charset="-120"/>
               </a:rPr>
-              <a:t>「A社NG / B社要確認」のような会社差は、H列(対応)に "代替: B社なら通る可能性" と書き残す</a:t>
+              <a:t>C列(商品名)は パンフ通りの正式名で書く(略さない、AIが照合しやすい)</a:t>
             </a:r>
             <a:endParaRPr lang="en-US" sz="1400" dirty="0"/>
           </a:p>
@@ -3504,7 +3541,7 @@
                 <a:ea typeface="Yu Gothic UI" pitchFamily="34" charset="-122"/>
                 <a:cs typeface="Yu Gothic UI" pitchFamily="34" charset="-120"/>
               </a:rPr>
-              <a:t>曖昧な口伝(「山田さんが言ってた」)も情報源列に残す(後で会社に確認する目印)</a:t>
+              <a:t>曖昧な口伝(「山田さんが言ってた」)も情報源列に "先輩口伝(要正式化)" と残す</a:t>
             </a:r>
             <a:endParaRPr lang="en-US" sz="1400" dirty="0"/>
           </a:p>
@@ -3525,7 +3562,7 @@
                 <a:ea typeface="Yu Gothic UI" pitchFamily="34" charset="-122"/>
                 <a:cs typeface="Yu Gothic UI" pitchFamily="34" charset="-120"/>
               </a:rPr>
-              <a:t>過去申込結果メモ(雑Excel)の実案件も 情報源として使えると強い</a:t>
+              <a:t>過去謝絶案件メモ(雑Excel)の実案件も 情報源として使えると信頼度が上がる</a:t>
             </a:r>
             <a:endParaRPr lang="en-US" sz="1400" dirty="0"/>
           </a:p>
@@ -3654,7 +3691,7 @@
                 <a:ea typeface="Yu Gothic UI" pitchFamily="34" charset="-122"/>
                 <a:cs typeface="Yu Gothic UI" pitchFamily="34" charset="-120"/>
               </a:rPr>
-              <a:t>スプシ「引受判定マスタ」テンプレを開く(10列: ID/カテゴリ/保険会社/商品ジャンル/条件詳細/判定/理由/対応or代替候補社/情報源/更新日)</a:t>
+              <a:t>スプシ「引受判定マスタ」テンプレを開く(10列: ID/保険会社/商品名/カテゴリ/条件詳細/判定/理由/対応/情報源/更新日)</a:t>
             </a:r>
             <a:endParaRPr lang="en-US" sz="1400" dirty="0"/>
           </a:p>
@@ -3675,7 +3712,7 @@
                 <a:ea typeface="Yu Gothic UI" pitchFamily="34" charset="-122"/>
                 <a:cs typeface="Yu Gothic UI" pitchFamily="34" charset="-120"/>
               </a:rPr>
-              <a:t>別シート「引受判定マスタ_記入例」で完成イメージを掴む(会社別の色分けあり)</a:t>
+              <a:t>別シート「引受判定マスタ_記入例」で完成イメージを掴む(商品別ソート・会社色分けあり)</a:t>
             </a:r>
             <a:endParaRPr lang="en-US" sz="1400" dirty="0"/>
           </a:p>
@@ -3696,7 +3733,7 @@
                 <a:ea typeface="Yu Gothic UI" pitchFamily="34" charset="-122"/>
                 <a:cs typeface="Yu Gothic UI" pitchFamily="34" charset="-120"/>
               </a:rPr>
-              <a:t>デモナレッジ 01〜06 を1つずつ読み、条件を抽出してマスタ表に1行ずつ書く</a:t>
+              <a:t>デモナレッジ 01〜06 を1つずつ読み、商品ごとに条件を抽出してマスタ表に1行ずつ書く</a:t>
             </a:r>
             <a:endParaRPr lang="en-US" sz="1400" dirty="0"/>
           </a:p>
@@ -3717,7 +3754,7 @@
                 <a:ea typeface="Yu Gothic UI" pitchFamily="34" charset="-122"/>
                 <a:cs typeface="Yu Gothic UI" pitchFamily="34" charset="-120"/>
               </a:rPr>
-              <a:t>同じ条件でも会社で判定が違う場合は 別々の行に(横並びで比較できる形)</a:t>
+              <a:t>同じ条件でも 商品が違えば 別々の行 に(例: 妊娠12週未満 → A社医療プレミアム NG行 / B社医療スタンダード YES行)</a:t>
             </a:r>
             <a:endParaRPr lang="en-US" sz="1400" dirty="0"/>
           </a:p>
@@ -3829,7 +3866,7 @@
                 <a:ea typeface="Yu Gothic UI Semibold" pitchFamily="34" charset="-122"/>
                 <a:cs typeface="Yu Gothic UI Semibold" pitchFamily="34" charset="-120"/>
               </a:rPr>
-              <a:t>演習1 散在ナレッジを 代理店マスタ表 10列に統合 — 観点別チェック</a:t>
+              <a:t>演習1 散在ナレッジを 商品別マスタ表 10列に統合 — 観点別チェック</a:t>
             </a:r>
             <a:endParaRPr lang="en-US" sz="2600" dirty="0"/>
           </a:p>
@@ -3993,7 +4030,7 @@
                 <a:ea typeface="Yu Gothic UI Semibold" pitchFamily="34" charset="-122"/>
                 <a:cs typeface="Yu Gothic UI Semibold" pitchFamily="34" charset="-120"/>
               </a:rPr>
-              <a:t>A. 会社軸での整理</a:t>
+              <a:t>A. 商品カルテとして機能するか</a:t>
             </a:r>
             <a:endParaRPr lang="en-US" sz="1500" dirty="0"/>
           </a:p>
@@ -4046,7 +4083,7 @@
                 <a:ea typeface="Yu Gothic UI" pitchFamily="34" charset="-122"/>
                 <a:cs typeface="Yu Gothic UI" pitchFamily="34" charset="-120"/>
               </a:rPr>
-              <a:t>同じ条件でも会社で判定違う場合、1行に無理やり統合せず 別々の行になっているか</a:t>
+              <a:t>C列(商品名)でソートして "その商品の条件一覧" が見える状態になっているか</a:t>
             </a:r>
             <a:endParaRPr lang="en-US" sz="1300" dirty="0"/>
           </a:p>
@@ -4099,7 +4136,7 @@
                 <a:ea typeface="Yu Gothic UI" pitchFamily="34" charset="-122"/>
                 <a:cs typeface="Yu Gothic UI" pitchFamily="34" charset="-120"/>
               </a:rPr>
-              <a:t>A社行と B社行を隣り合わせに並べてみて、比較できるか確認</a:t>
+              <a:t>同じ商品の行が散在していたら並べ替え。同じ条件を複数商品でまとめて書いてないか確認</a:t>
             </a:r>
             <a:endParaRPr lang="en-US" sz="1300" dirty="0"/>
           </a:p>
@@ -4277,7 +4314,7 @@
                 <a:ea typeface="Yu Gothic UI" pitchFamily="34" charset="-122"/>
                 <a:cs typeface="Yu Gothic UI" pitchFamily="34" charset="-120"/>
               </a:rPr>
-              <a:t>情報源列に "どの会社の誰から/どの文書" が全行に入っているか</a:t>
+              <a:t>情報源列に "どの商品パンフ/誰から/どの文書" が全行に入っているか</a:t>
             </a:r>
             <a:endParaRPr lang="en-US" sz="1300" dirty="0"/>
           </a:p>
@@ -4455,7 +4492,7 @@
                 <a:ea typeface="Yu Gothic UI Semibold" pitchFamily="34" charset="-122"/>
                 <a:cs typeface="Yu Gothic UI Semibold" pitchFamily="34" charset="-120"/>
               </a:rPr>
-              <a:t>C. 代替候補社の記述</a:t>
+              <a:t>C. 対応の記述</a:t>
             </a:r>
             <a:endParaRPr lang="en-US" sz="1500" dirty="0"/>
           </a:p>
@@ -4508,7 +4545,7 @@
                 <a:ea typeface="Yu Gothic UI" pitchFamily="34" charset="-122"/>
                 <a:cs typeface="Yu Gothic UI" pitchFamily="34" charset="-120"/>
               </a:rPr>
-              <a:t>NG判定の行に "代替: 〇社なら通る可能性" が書けているか</a:t>
+              <a:t>NG判定の行に "顧客に何と説明するか" "再申込タイミング" "代替商品" が書けているか</a:t>
             </a:r>
             <a:endParaRPr lang="en-US" sz="1300" dirty="0"/>
           </a:p>
@@ -4561,7 +4598,7 @@
                 <a:ea typeface="Yu Gothic UI" pitchFamily="34" charset="-122"/>
                 <a:cs typeface="Yu Gothic UI" pitchFamily="34" charset="-120"/>
               </a:rPr>
-              <a:t>"NG → 終わり" ではなく "NG → 別会社の代替提案" が代理店の付加価値と伝える</a:t>
+              <a:t>"NG → 終わり" ではなく "NG → お客様に何と伝えるか" が代理店の付加価値と伝える</a:t>
             </a:r>
             <a:endParaRPr lang="en-US" sz="1300" dirty="0"/>
           </a:p>
@@ -4652,7 +4689,7 @@
                 <a:ea typeface="Yu Gothic UI Semibold" pitchFamily="34" charset="-122"/>
                 <a:cs typeface="Yu Gothic UI Semibold" pitchFamily="34" charset="-120"/>
               </a:rPr>
-              <a:t>演習2 "どの会社なら通る?" AI一次判定 と 更新運用</a:t>
+              <a:t>演習2 "この商品で通る?" AI一次判定 と 更新運用</a:t>
             </a:r>
             <a:endParaRPr lang="en-US" sz="2600" dirty="0"/>
           </a:p>
@@ -4780,7 +4817,7 @@
                 <a:ea typeface="Yu Gothic UI" pitchFamily="34" charset="-122"/>
                 <a:cs typeface="Yu Gothic UI" pitchFamily="34" charset="-120"/>
               </a:rPr>
-              <a:t>整理したマスタ表を Gemini に読ませて、顧客情報 → 会社別の一次判定 ができるか試す。</a:t>
+              <a:t>整理したマスタ表を Gemini に読ませて、顧客情報+検討商品 → 判定 ができるか試す。</a:t>
             </a:r>
             <a:endParaRPr lang="en-US" sz="1400" dirty="0"/>
           </a:p>
@@ -4800,7 +4837,7 @@
                 <a:ea typeface="Yu Gothic UI" pitchFamily="34" charset="-122"/>
                 <a:cs typeface="Yu Gothic UI" pitchFamily="34" charset="-120"/>
               </a:rPr>
-              <a:t>「A社NG / B社要確認 / D社ライトなら通るかも」のような 代理店らしい "見立て" を返させる。</a:t>
+              <a:t>「A社医療プレミアムなら NG、対応は…」のような 商品カルテを引いた判定を返させる。</a:t>
             </a:r>
             <a:endParaRPr lang="en-US" sz="1400" dirty="0"/>
           </a:p>
@@ -4820,7 +4857,7 @@
                 <a:ea typeface="Yu Gothic UI" pitchFamily="34" charset="-122"/>
                 <a:cs typeface="Yu Gothic UI" pitchFamily="34" charset="-120"/>
               </a:rPr>
-              <a:t>あわせて「更新ログ」シートを埋めて、月次で各社の商品改定情報を追える仕組みに。</a:t>
+              <a:t>あわせて「更新ログ」シートを埋めて、月次で各商品の改定情報を追える仕組みに。</a:t>
             </a:r>
             <a:endParaRPr lang="en-US" sz="1400" dirty="0"/>
           </a:p>
@@ -4949,7 +4986,7 @@
                 <a:ea typeface="Yu Gothic UI" pitchFamily="34" charset="-122"/>
                 <a:cs typeface="Yu Gothic UI" pitchFamily="34" charset="-120"/>
               </a:rPr>
-              <a:t>Gemini に「あなたは保険代理店の事前引受スクリーニングAIです」と役割を明示</a:t>
+              <a:t>Gemini に「あなたは保険代理店の 引受判定サポートAI です」と役割を明示</a:t>
             </a:r>
             <a:endParaRPr lang="en-US" sz="1400" dirty="0"/>
           </a:p>
@@ -4970,7 +5007,7 @@
                 <a:ea typeface="Yu Gothic UI" pitchFamily="34" charset="-122"/>
                 <a:cs typeface="Yu Gothic UI" pitchFamily="34" charset="-120"/>
               </a:rPr>
-              <a:t>出力に "参照した条件ID" と "会社名" を必ず含めさせる(監査可能に)</a:t>
+              <a:t>プロンプトに 顧客情報 と 検討中の商品名 を明示的に分けて渡す</a:t>
             </a:r>
             <a:endParaRPr lang="en-US" sz="1400" dirty="0"/>
           </a:p>
@@ -4991,7 +5028,7 @@
                 <a:ea typeface="Yu Gothic UI" pitchFamily="34" charset="-122"/>
                 <a:cs typeface="Yu Gothic UI" pitchFamily="34" charset="-120"/>
               </a:rPr>
-              <a:t>該当なしは「各社支社に事前相談要」でフォールバック(勝手にYESと出させない)</a:t>
+              <a:t>出力に "該当した条件ID" を必ず含めさせる(監査可能に)</a:t>
             </a:r>
             <a:endParaRPr lang="en-US" sz="1400" dirty="0"/>
           </a:p>
@@ -5012,7 +5049,7 @@
                 <a:ea typeface="Yu Gothic UI" pitchFamily="34" charset="-122"/>
                 <a:cs typeface="Yu Gothic UI" pitchFamily="34" charset="-120"/>
               </a:rPr>
-              <a:t>更新は "削除" ではなく "無効化" で運用(過去顧客への説明時に必要)</a:t>
+              <a:t>該当なしは「商品担当に事前確認要」でフォールバック(勝手にYESと出させない)</a:t>
             </a:r>
             <a:endParaRPr lang="en-US" sz="1400" dirty="0"/>
           </a:p>
@@ -5141,7 +5178,7 @@
                 <a:ea typeface="Yu Gothic UI" pitchFamily="34" charset="-122"/>
                 <a:cs typeface="Yu Gothic UI" pitchFamily="34" charset="-120"/>
               </a:rPr>
-              <a:t>マスタ表をCSV形式で Gemini に渡し、顧客情報3件 → 会社別の一次判定を実行</a:t>
+              <a:t>マスタ表をCSV形式で Gemini に渡し、顧客情報+検討商品名 → 判定 を実行(3ケース)</a:t>
             </a:r>
             <a:endParaRPr lang="en-US" sz="1400" dirty="0"/>
           </a:p>
@@ -5162,7 +5199,7 @@
                 <a:ea typeface="Yu Gothic UI" pitchFamily="34" charset="-122"/>
                 <a:cs typeface="Yu Gothic UI" pitchFamily="34" charset="-120"/>
               </a:rPr>
-              <a:t>判定結果に「通りそうな会社(YES) / 要確認で相談推奨 / NG会社 / 代替提案 / 次のアクション」を出力させる</a:t>
+              <a:t>同じ顧客で商品だけ変えて再判定させ、商品カルテとして機能することを確認</a:t>
             </a:r>
             <a:endParaRPr lang="en-US" sz="1400" dirty="0"/>
           </a:p>
@@ -5183,7 +5220,7 @@
                 <a:ea typeface="Yu Gothic UI" pitchFamily="34" charset="-122"/>
                 <a:cs typeface="Yu Gothic UI" pitchFamily="34" charset="-120"/>
               </a:rPr>
-              <a:t>該当ルールがない顧客を試す →「該当なし → 各社支社に事前相談要」で返ることを確認</a:t>
+              <a:t>判定結果に「この商品での判定 / 該当条件ID / 判定理由 / 対応 / 次のアクション」を出力</a:t>
             </a:r>
             <a:endParaRPr lang="en-US" sz="1400" dirty="0"/>
           </a:p>
@@ -5204,7 +5241,28 @@
                 <a:ea typeface="Yu Gothic UI" pitchFamily="34" charset="-122"/>
                 <a:cs typeface="Yu Gothic UI" pitchFamily="34" charset="-120"/>
               </a:rPr>
-              <a:t>「更新ログ」シートに ダミー更新を2件 記入(各社の商品改定を反映する練習)</a:t>
+              <a:t>該当ルールがない顧客+商品を試す →「該当なし → 商品担当に事前確認要」で返ることを確認</a:t>
+            </a:r>
+            <a:endParaRPr lang="en-US" sz="1400" dirty="0"/>
+          </a:p>
+          <a:p>
+            <a:pPr marL="342900" indent="-342900">
+              <a:spcAft>
+                <a:spcPts val="400"/>
+              </a:spcAft>
+              <a:buSzPct val="100000"/>
+              <a:buChar char="●"/>
+            </a:pPr>
+            <a:r>
+              <a:rPr lang="en-US" sz="1400" dirty="0">
+                <a:solidFill>
+                  <a:srgbClr val="1A1A1A"/>
+                </a:solidFill>
+                <a:latin typeface="Yu Gothic UI" pitchFamily="34" charset="0"/>
+                <a:ea typeface="Yu Gothic UI" pitchFamily="34" charset="-122"/>
+                <a:cs typeface="Yu Gothic UI" pitchFamily="34" charset="-120"/>
+              </a:rPr>
+              <a:t>「更新ログ」シートに ダミー更新を2件 記入(各商品の改定を反映する練習)</a:t>
             </a:r>
             <a:endParaRPr lang="en-US" sz="1400" dirty="0"/>
           </a:p>
@@ -5316,7 +5374,7 @@
                 <a:ea typeface="Yu Gothic UI Semibold" pitchFamily="34" charset="-122"/>
                 <a:cs typeface="Yu Gothic UI Semibold" pitchFamily="34" charset="-120"/>
               </a:rPr>
-              <a:t>演習2 "どの会社なら通る?" AI一次判定 と 更新運用 — 観点別チェック</a:t>
+              <a:t>演習2 "この商品で通る?" AI一次判定 と 更新運用 — 観点別チェック</a:t>
             </a:r>
             <a:endParaRPr lang="en-US" sz="2600" dirty="0"/>
           </a:p>
@@ -5480,7 +5538,7 @@
                 <a:ea typeface="Yu Gothic UI Semibold" pitchFamily="34" charset="-122"/>
                 <a:cs typeface="Yu Gothic UI Semibold" pitchFamily="34" charset="-120"/>
               </a:rPr>
-              <a:t>A. 会社別の見立て</a:t>
+              <a:t>A. 商品ごとの判定</a:t>
             </a:r>
             <a:endParaRPr lang="en-US" sz="1500" dirty="0"/>
           </a:p>
@@ -5533,7 +5591,7 @@
                 <a:ea typeface="Yu Gothic UI" pitchFamily="34" charset="-122"/>
                 <a:cs typeface="Yu Gothic UI" pitchFamily="34" charset="-120"/>
               </a:rPr>
-              <a:t>出力に "A社 / B社 / D社..." のように 会社別の判定 が並んでいるか</a:t>
+              <a:t>出力に "この商品での判定" と "該当した条件ID" が入っているか</a:t>
             </a:r>
             <a:endParaRPr lang="en-US" sz="1300" dirty="0"/>
           </a:p>
@@ -5586,7 +5644,7 @@
                 <a:ea typeface="Yu Gothic UI" pitchFamily="34" charset="-122"/>
                 <a:cs typeface="Yu Gothic UI" pitchFamily="34" charset="-120"/>
               </a:rPr>
-              <a:t>「YESの会社 / 要確認の会社 / NGの会社 / 代替提案」の4区分で出力させる</a:t>
+              <a:t>同じ顧客で別商品に切り替えたら、別の条件IDが返るか確認</a:t>
             </a:r>
             <a:endParaRPr lang="en-US" sz="1300" dirty="0"/>
           </a:p>
@@ -5764,7 +5822,7 @@
                 <a:ea typeface="Yu Gothic UI" pitchFamily="34" charset="-122"/>
                 <a:cs typeface="Yu Gothic UI" pitchFamily="34" charset="-120"/>
               </a:rPr>
-              <a:t>マスタにない条件で "自動YES" にせず "各社支社に事前相談要" になるか</a:t>
+              <a:t>マスタにない条件で "自動YES" にせず "商品担当に事前確認要" になるか</a:t>
             </a:r>
             <a:endParaRPr lang="en-US" sz="1300" dirty="0"/>
           </a:p>
@@ -5817,7 +5875,7 @@
                 <a:ea typeface="Yu Gothic UI" pitchFamily="34" charset="-122"/>
                 <a:cs typeface="Yu Gothic UI" pitchFamily="34" charset="-120"/>
               </a:rPr>
-              <a:t>テスト: 「パラグライダー競技選手 / 死亡保険」で確認</a:t>
+              <a:t>テスト: 「パラグライダー競技選手 / A社死亡プレミアム」で確認</a:t>
             </a:r>
             <a:endParaRPr lang="en-US" sz="1300" dirty="0"/>
           </a:p>
@@ -5995,7 +6053,7 @@
                 <a:ea typeface="Yu Gothic UI" pitchFamily="34" charset="-122"/>
                 <a:cs typeface="Yu Gothic UI" pitchFamily="34" charset="-120"/>
               </a:rPr>
-              <a:t>各社の商品改定を追える仕組みが決まったか</a:t>
+              <a:t>各商品の改定を追える仕組みが決まったか</a:t>
             </a:r>
             <a:endParaRPr lang="en-US" sz="1300" dirty="0"/>
           </a:p>
@@ -6048,7 +6106,7 @@
                 <a:ea typeface="Yu Gothic UI" pitchFamily="34" charset="-122"/>
                 <a:cs typeface="Yu Gothic UI" pitchFamily="34" charset="-120"/>
               </a:rPr>
-              <a:t>担当者名/曜日まで決めさせる(「田中さんが毎月第1金曜、各社営業担当に一斉ヒアリング」等)</a:t>
+              <a:t>担当者名/曜日まで決めさせる(「田中さんが毎月第1金曜に各商品担当へヒアリング」等)</a:t>
             </a:r>
             <a:endParaRPr lang="en-US" sz="1300" dirty="0"/>
           </a:p>
@@ -6244,7 +6302,7 @@
                 <a:ea typeface="Yu Gothic UI Semibold" pitchFamily="34" charset="-122"/>
                 <a:cs typeface="Yu Gothic UI Semibold" pitchFamily="34" charset="-120"/>
               </a:rPr>
-              <a:t>各社の基準を1つの表に</a:t>
+              <a:t>商品ごとの引受条件を1つの表に</a:t>
             </a:r>
             <a:endParaRPr lang="en-US" sz="1800" dirty="0"/>
           </a:p>
@@ -6283,7 +6341,7 @@
                 <a:ea typeface="Yu Gothic UI" pitchFamily="34" charset="-122"/>
                 <a:cs typeface="Yu Gothic UI" pitchFamily="34" charset="-120"/>
               </a:rPr>
-              <a:t>各社バラバラの引受基準を 代理店マスタ表10列に集約。会社比較が瞬時にできる状態。</a:t>
+              <a:t>扱い商品バラバラだった条件を マスタ表10列に集約。商品カルテとして機能する状態。</a:t>
             </a:r>
             <a:endParaRPr lang="en-US" sz="1300" dirty="0"/>
           </a:p>
@@ -6388,7 +6446,7 @@
                 <a:ea typeface="Yu Gothic UI Semibold" pitchFamily="34" charset="-122"/>
                 <a:cs typeface="Yu Gothic UI Semibold" pitchFamily="34" charset="-120"/>
               </a:rPr>
-              <a:t>"どこなら通る?" が言える</a:t>
+              <a:t>"この商品で通る?" が言える</a:t>
             </a:r>
             <a:endParaRPr lang="en-US" sz="1800" dirty="0"/>
           </a:p>
@@ -6427,7 +6485,7 @@
                 <a:ea typeface="Yu Gothic UI" pitchFamily="34" charset="-122"/>
                 <a:cs typeface="Yu Gothic UI" pitchFamily="34" charset="-120"/>
               </a:rPr>
-              <a:t>NG会社と代替候補社が並んで見える。お客様に "無駄な申込" をさせない。</a:t>
+              <a:t>申込前にAIで判定 → お客様に "無駄な申込" をさせない。</a:t>
             </a:r>
             <a:endParaRPr lang="en-US" sz="1300" dirty="0"/>
           </a:p>
@@ -6532,7 +6590,7 @@
                 <a:ea typeface="Yu Gothic UI Semibold" pitchFamily="34" charset="-122"/>
                 <a:cs typeface="Yu Gothic UI Semibold" pitchFamily="34" charset="-120"/>
               </a:rPr>
-              <a:t>AI が一次スクリーニング, 最終判定は各社</a:t>
+              <a:t>AI が一次判定, 最終判定は保険会社</a:t>
             </a:r>
             <a:endParaRPr lang="en-US" sz="1800" dirty="0"/>
           </a:p>
@@ -6571,7 +6629,7 @@
                 <a:ea typeface="Yu Gothic UI" pitchFamily="34" charset="-122"/>
                 <a:cs typeface="Yu Gothic UI" pitchFamily="34" charset="-120"/>
               </a:rPr>
-              <a:t>事前スクリーニングで謝絶体験を減らす。最終は各保険会社の査定に委ねる。</a:t>
+              <a:t>事前判定で謝絶体験を減らす。最終は保険会社の査定に委ねる。</a:t>
             </a:r>
             <a:endParaRPr lang="en-US" sz="1300" dirty="0"/>
           </a:p>
